--- a/FASE 3/Evidencias Grupales/Formato Presentación final.pptx
+++ b/FASE 3/Evidencias Grupales/Formato Presentación final.pptx
@@ -5,7 +5,7 @@
     <p:sldMasterId id="2147483648" r:id="rId1"/>
   </p:sldMasterIdLst>
   <p:notesMasterIdLst>
-    <p:notesMasterId r:id="rId18"/>
+    <p:notesMasterId r:id="rId17"/>
   </p:notesMasterIdLst>
   <p:sldIdLst>
     <p:sldId id="256" r:id="rId2"/>
@@ -18,12 +18,11 @@
     <p:sldId id="263" r:id="rId9"/>
     <p:sldId id="269" r:id="rId10"/>
     <p:sldId id="271" r:id="rId11"/>
-    <p:sldId id="272" r:id="rId12"/>
-    <p:sldId id="270" r:id="rId13"/>
-    <p:sldId id="265" r:id="rId14"/>
-    <p:sldId id="267" r:id="rId15"/>
-    <p:sldId id="268" r:id="rId16"/>
-    <p:sldId id="266" r:id="rId17"/>
+    <p:sldId id="270" r:id="rId12"/>
+    <p:sldId id="265" r:id="rId13"/>
+    <p:sldId id="273" r:id="rId14"/>
+    <p:sldId id="274" r:id="rId15"/>
+    <p:sldId id="266" r:id="rId16"/>
   </p:sldIdLst>
   <p:sldSz cx="12192000" cy="6858000"/>
   <p:notesSz cx="6858000" cy="9144000"/>
@@ -142,8 +141,8 @@
 <pc:chgInfo xmlns:a="http://schemas.openxmlformats.org/drawingml/2006/main" xmlns:r="http://schemas.openxmlformats.org/officeDocument/2006/relationships" xmlns:ac="http://schemas.microsoft.com/office/drawing/2013/main/command" xmlns:pc="http://schemas.microsoft.com/office/powerpoint/2013/main/command">
   <pc:docChgLst>
     <pc:chgData name="Claudio Brito Soto" userId="c5a544fb6cb7e854" providerId="LiveId" clId="{846207F7-003C-4719-8AF9-79713FD361D0}"/>
-    <pc:docChg chg="custSel addSld modSld">
-      <pc:chgData name="Claudio Brito Soto" userId="c5a544fb6cb7e854" providerId="LiveId" clId="{846207F7-003C-4719-8AF9-79713FD361D0}" dt="2025-11-03T22:40:49.225" v="369"/>
+    <pc:docChg chg="custSel addSld delSld modSld">
+      <pc:chgData name="Claudio Brito Soto" userId="c5a544fb6cb7e854" providerId="LiveId" clId="{846207F7-003C-4719-8AF9-79713FD361D0}" dt="2025-11-20T23:01:35.505" v="425" actId="47"/>
       <pc:docMkLst>
         <pc:docMk/>
       </pc:docMkLst>
@@ -161,8 +160,8 @@
           <pc:sldMk cId="2436815989" sldId="257"/>
         </pc:sldMkLst>
       </pc:sldChg>
-      <pc:sldChg chg="modSp modTransition">
-        <pc:chgData name="Claudio Brito Soto" userId="c5a544fb6cb7e854" providerId="LiveId" clId="{846207F7-003C-4719-8AF9-79713FD361D0}" dt="2025-11-03T22:40:46.813" v="368"/>
+      <pc:sldChg chg="modSp modTransition modAnim">
+        <pc:chgData name="Claudio Brito Soto" userId="c5a544fb6cb7e854" providerId="LiveId" clId="{846207F7-003C-4719-8AF9-79713FD361D0}" dt="2025-11-20T23:00:47.644" v="420"/>
         <pc:sldMkLst>
           <pc:docMk/>
           <pc:sldMk cId="775730755" sldId="258"/>
@@ -184,8 +183,8 @@
           </ac:spMkLst>
         </pc:spChg>
       </pc:sldChg>
-      <pc:sldChg chg="modSp mod modTransition">
-        <pc:chgData name="Claudio Brito Soto" userId="c5a544fb6cb7e854" providerId="LiveId" clId="{846207F7-003C-4719-8AF9-79713FD361D0}" dt="2025-11-03T22:40:38.098" v="358"/>
+      <pc:sldChg chg="modSp mod modTransition modAnim">
+        <pc:chgData name="Claudio Brito Soto" userId="c5a544fb6cb7e854" providerId="LiveId" clId="{846207F7-003C-4719-8AF9-79713FD361D0}" dt="2025-11-20T23:00:31.033" v="417"/>
         <pc:sldMkLst>
           <pc:docMk/>
           <pc:sldMk cId="2717669782" sldId="259"/>
@@ -222,8 +221,8 @@
           </ac:picMkLst>
         </pc:picChg>
       </pc:sldChg>
-      <pc:sldChg chg="addSp modSp mod modTransition modAnim">
-        <pc:chgData name="Claudio Brito Soto" userId="c5a544fb6cb7e854" providerId="LiveId" clId="{846207F7-003C-4719-8AF9-79713FD361D0}" dt="2025-11-03T22:40:49.225" v="369"/>
+      <pc:sldChg chg="addSp modSp mod modTransition modAnim modNotesTx">
+        <pc:chgData name="Claudio Brito Soto" userId="c5a544fb6cb7e854" providerId="LiveId" clId="{846207F7-003C-4719-8AF9-79713FD361D0}" dt="2025-11-20T23:00:54.758" v="421"/>
         <pc:sldMkLst>
           <pc:docMk/>
           <pc:sldMk cId="3324313383" sldId="262"/>
@@ -304,20 +303,6 @@
         <pc:sldMkLst>
           <pc:docMk/>
           <pc:sldMk cId="489174681" sldId="265"/>
-        </pc:sldMkLst>
-      </pc:sldChg>
-      <pc:sldChg chg="modTransition">
-        <pc:chgData name="Claudio Brito Soto" userId="c5a544fb6cb7e854" providerId="LiveId" clId="{846207F7-003C-4719-8AF9-79713FD361D0}" dt="2025-11-03T22:40:42.563" v="364"/>
-        <pc:sldMkLst>
-          <pc:docMk/>
-          <pc:sldMk cId="2904893737" sldId="267"/>
-        </pc:sldMkLst>
-      </pc:sldChg>
-      <pc:sldChg chg="modTransition">
-        <pc:chgData name="Claudio Brito Soto" userId="c5a544fb6cb7e854" providerId="LiveId" clId="{846207F7-003C-4719-8AF9-79713FD361D0}" dt="2025-11-03T22:40:43.121" v="365"/>
-        <pc:sldMkLst>
-          <pc:docMk/>
-          <pc:sldMk cId="1266268508" sldId="268"/>
         </pc:sldMkLst>
       </pc:sldChg>
       <pc:sldChg chg="modTransition">
@@ -437,12 +422,89 @@
           </ac:picMkLst>
         </pc:picChg>
       </pc:sldChg>
+      <pc:sldChg chg="modTransition modNotesTx">
+        <pc:chgData name="Claudio Brito Soto" userId="c5a544fb6cb7e854" providerId="LiveId" clId="{846207F7-003C-4719-8AF9-79713FD361D0}" dt="2025-11-20T23:01:01.567" v="422"/>
+        <pc:sldMkLst>
+          <pc:docMk/>
+          <pc:sldMk cId="2049997801" sldId="272"/>
+        </pc:sldMkLst>
+      </pc:sldChg>
+      <pc:sldChg chg="addSp delSp modSp new mod modTransition modAnim modNotesTx">
+        <pc:chgData name="Claudio Brito Soto" userId="c5a544fb6cb7e854" providerId="LiveId" clId="{846207F7-003C-4719-8AF9-79713FD361D0}" dt="2025-11-20T23:01:06.261" v="423"/>
+        <pc:sldMkLst>
+          <pc:docMk/>
+          <pc:sldMk cId="447901124" sldId="273"/>
+        </pc:sldMkLst>
+        <pc:picChg chg="add mod">
+          <ac:chgData name="Claudio Brito Soto" userId="c5a544fb6cb7e854" providerId="LiveId" clId="{846207F7-003C-4719-8AF9-79713FD361D0}" dt="2025-11-20T22:53:48.012" v="379" actId="14100"/>
+          <ac:picMkLst>
+            <pc:docMk/>
+            <pc:sldMk cId="447901124" sldId="273"/>
+            <ac:picMk id="5" creationId="{364E9D3B-2337-CF65-FA07-D23A76CB1657}"/>
+          </ac:picMkLst>
+        </pc:picChg>
+        <pc:picChg chg="add mod">
+          <ac:chgData name="Claudio Brito Soto" userId="c5a544fb6cb7e854" providerId="LiveId" clId="{846207F7-003C-4719-8AF9-79713FD361D0}" dt="2025-11-20T22:54:51.688" v="383" actId="962"/>
+          <ac:picMkLst>
+            <pc:docMk/>
+            <pc:sldMk cId="447901124" sldId="273"/>
+            <ac:picMk id="7" creationId="{23F9B9B1-9E7C-7761-72BA-D2FF0FCD7AFC}"/>
+          </ac:picMkLst>
+        </pc:picChg>
+        <pc:picChg chg="add mod">
+          <ac:chgData name="Claudio Brito Soto" userId="c5a544fb6cb7e854" providerId="LiveId" clId="{846207F7-003C-4719-8AF9-79713FD361D0}" dt="2025-11-20T22:55:16.590" v="390" actId="14100"/>
+          <ac:picMkLst>
+            <pc:docMk/>
+            <pc:sldMk cId="447901124" sldId="273"/>
+            <ac:picMk id="9" creationId="{8E1647BB-DE30-89DA-6FD6-7131D3E6905A}"/>
+          </ac:picMkLst>
+        </pc:picChg>
+        <pc:picChg chg="add mod">
+          <ac:chgData name="Claudio Brito Soto" userId="c5a544fb6cb7e854" providerId="LiveId" clId="{846207F7-003C-4719-8AF9-79713FD361D0}" dt="2025-11-20T22:55:31.436" v="394" actId="962"/>
+          <ac:picMkLst>
+            <pc:docMk/>
+            <pc:sldMk cId="447901124" sldId="273"/>
+            <ac:picMk id="11" creationId="{27AA84C0-D6A9-BC68-6A54-58FE5AC96154}"/>
+          </ac:picMkLst>
+        </pc:picChg>
+        <pc:picChg chg="add mod">
+          <ac:chgData name="Claudio Brito Soto" userId="c5a544fb6cb7e854" providerId="LiveId" clId="{846207F7-003C-4719-8AF9-79713FD361D0}" dt="2025-11-20T22:55:42.954" v="398" actId="962"/>
+          <ac:picMkLst>
+            <pc:docMk/>
+            <pc:sldMk cId="447901124" sldId="273"/>
+            <ac:picMk id="13" creationId="{F872A573-3FAB-4F42-1FAE-EAF6F51036B9}"/>
+          </ac:picMkLst>
+        </pc:picChg>
+        <pc:picChg chg="add mod">
+          <ac:chgData name="Claudio Brito Soto" userId="c5a544fb6cb7e854" providerId="LiveId" clId="{846207F7-003C-4719-8AF9-79713FD361D0}" dt="2025-11-20T22:55:55.824" v="402" actId="962"/>
+          <ac:picMkLst>
+            <pc:docMk/>
+            <pc:sldMk cId="447901124" sldId="273"/>
+            <ac:picMk id="15" creationId="{E7BFA726-D105-3E06-8704-EC386163BE9B}"/>
+          </ac:picMkLst>
+        </pc:picChg>
+        <pc:picChg chg="add mod">
+          <ac:chgData name="Claudio Brito Soto" userId="c5a544fb6cb7e854" providerId="LiveId" clId="{846207F7-003C-4719-8AF9-79713FD361D0}" dt="2025-11-20T22:56:06.264" v="406" actId="962"/>
+          <ac:picMkLst>
+            <pc:docMk/>
+            <pc:sldMk cId="447901124" sldId="273"/>
+            <ac:picMk id="17" creationId="{6EED29DE-FD1B-A169-8C9B-38A2BBF8B27D}"/>
+          </ac:picMkLst>
+        </pc:picChg>
+      </pc:sldChg>
+      <pc:sldChg chg="add">
+        <pc:chgData name="Claudio Brito Soto" userId="c5a544fb6cb7e854" providerId="LiveId" clId="{846207F7-003C-4719-8AF9-79713FD361D0}" dt="2025-11-20T22:56:28.816" v="408"/>
+        <pc:sldMkLst>
+          <pc:docMk/>
+          <pc:sldMk cId="1419688379" sldId="274"/>
+        </pc:sldMkLst>
+      </pc:sldChg>
     </pc:docChg>
   </pc:docChgLst>
   <pc:docChgLst>
     <pc:chgData name="Claudio Brito Soto" userId="c5a544fb6cb7e854" providerId="LiveId" clId="{B36081EC-44F6-4E4F-9E2C-18EAC813F962}"/>
-    <pc:docChg chg="undo custSel addSld modSld">
-      <pc:chgData name="Claudio Brito Soto" userId="c5a544fb6cb7e854" providerId="LiveId" clId="{B36081EC-44F6-4E4F-9E2C-18EAC813F962}" dt="2025-11-20T16:57:09.739" v="643" actId="14100"/>
+    <pc:docChg chg="undo custSel addSld delSld modSld">
+      <pc:chgData name="Claudio Brito Soto" userId="c5a544fb6cb7e854" providerId="LiveId" clId="{B36081EC-44F6-4E4F-9E2C-18EAC813F962}" dt="2025-11-24T17:09:35.768" v="645" actId="47"/>
       <pc:docMkLst>
         <pc:docMk/>
       </pc:docMkLst>
@@ -613,7 +675,7 @@
         </pc:sldMkLst>
       </pc:sldChg>
       <pc:sldChg chg="addSp modSp mod">
-        <pc:chgData name="Claudio Brito Soto" userId="c5a544fb6cb7e854" providerId="LiveId" clId="{B36081EC-44F6-4E4F-9E2C-18EAC813F962}" dt="2025-11-01T21:20:10.773" v="114" actId="167"/>
+        <pc:chgData name="Claudio Brito Soto" userId="c5a544fb6cb7e854" providerId="LiveId" clId="{B36081EC-44F6-4E4F-9E2C-18EAC813F962}" dt="2025-11-24T17:09:26.513" v="644" actId="1076"/>
         <pc:sldMkLst>
           <pc:docMk/>
           <pc:sldMk cId="2752457618" sldId="269"/>
@@ -624,6 +686,14 @@
             <pc:docMk/>
             <pc:sldMk cId="2752457618" sldId="269"/>
             <ac:spMk id="6" creationId="{54D38248-5D31-85F9-1E0F-4A607BCD5F6A}"/>
+          </ac:spMkLst>
+        </pc:spChg>
+        <pc:spChg chg="mod">
+          <ac:chgData name="Claudio Brito Soto" userId="c5a544fb6cb7e854" providerId="LiveId" clId="{B36081EC-44F6-4E4F-9E2C-18EAC813F962}" dt="2025-11-24T17:09:26.513" v="644" actId="1076"/>
+          <ac:spMkLst>
+            <pc:docMk/>
+            <pc:sldMk cId="2752457618" sldId="269"/>
+            <ac:spMk id="7" creationId="{3A739E92-330D-944C-ED3E-C7F02FA216B3}"/>
           </ac:spMkLst>
         </pc:spChg>
         <pc:picChg chg="add mod ord">
@@ -810,20 +880,12 @@
           </ac:picMkLst>
         </pc:picChg>
       </pc:sldChg>
-      <pc:sldChg chg="addSp delSp modSp new mod">
-        <pc:chgData name="Claudio Brito Soto" userId="c5a544fb6cb7e854" providerId="LiveId" clId="{B36081EC-44F6-4E4F-9E2C-18EAC813F962}" dt="2025-11-20T16:57:09.739" v="643" actId="14100"/>
+      <pc:sldChg chg="addSp delSp modSp new del mod">
+        <pc:chgData name="Claudio Brito Soto" userId="c5a544fb6cb7e854" providerId="LiveId" clId="{B36081EC-44F6-4E4F-9E2C-18EAC813F962}" dt="2025-11-24T17:09:35.768" v="645" actId="47"/>
         <pc:sldMkLst>
           <pc:docMk/>
           <pc:sldMk cId="2049997801" sldId="272"/>
         </pc:sldMkLst>
-        <pc:spChg chg="del">
-          <ac:chgData name="Claudio Brito Soto" userId="c5a544fb6cb7e854" providerId="LiveId" clId="{B36081EC-44F6-4E4F-9E2C-18EAC813F962}" dt="2025-11-20T16:57:01.138" v="639"/>
-          <ac:spMkLst>
-            <pc:docMk/>
-            <pc:sldMk cId="2049997801" sldId="272"/>
-            <ac:spMk id="3" creationId="{B0C9DB9B-5FF0-4379-8BA0-D87DE60FE501}"/>
-          </ac:spMkLst>
-        </pc:spChg>
         <pc:picChg chg="add mod">
           <ac:chgData name="Claudio Brito Soto" userId="c5a544fb6cb7e854" providerId="LiveId" clId="{B36081EC-44F6-4E4F-9E2C-18EAC813F962}" dt="2025-11-20T16:57:09.739" v="643" actId="14100"/>
           <ac:picMkLst>
@@ -1607,10 +1669,10 @@
         <a:lstStyle/>
         <a:p>
           <a:r>
-            <a:rPr lang="es-ES" dirty="0"/>
+            <a:rPr lang="es-ES"/>
             <a:t>Claudio Marcelo Brito Soto</a:t>
           </a:r>
-          <a:endParaRPr lang="es-CL" dirty="0"/>
+          <a:endParaRPr lang="es-CL"/>
         </a:p>
       </dgm:t>
     </dgm:pt>
@@ -1636,43 +1698,6 @@
         </a:p>
       </dgm:t>
     </dgm:pt>
-    <dgm:pt modelId="{D868444B-AE34-4422-A6A5-1F7D392D0C20}">
-      <dgm:prSet phldrT="[Texto]"/>
-      <dgm:spPr/>
-      <dgm:t>
-        <a:bodyPr/>
-        <a:lstStyle/>
-        <a:p>
-          <a:r>
-            <a:rPr lang="es-MX" dirty="0"/>
-            <a:t>Cargo</a:t>
-          </a:r>
-          <a:endParaRPr lang="es-CL" dirty="0"/>
-        </a:p>
-      </dgm:t>
-    </dgm:pt>
-    <dgm:pt modelId="{7DB88D83-6C3A-48C1-8CAD-0D11C3BEC35C}" type="parTrans" cxnId="{484B8A37-0122-4FF5-93D2-4A15DF521A17}">
-      <dgm:prSet/>
-      <dgm:spPr/>
-      <dgm:t>
-        <a:bodyPr/>
-        <a:lstStyle/>
-        <a:p>
-          <a:endParaRPr lang="es-CL"/>
-        </a:p>
-      </dgm:t>
-    </dgm:pt>
-    <dgm:pt modelId="{74B9B1A5-94EB-40A9-BFF2-678501068FB8}" type="sibTrans" cxnId="{484B8A37-0122-4FF5-93D2-4A15DF521A17}">
-      <dgm:prSet/>
-      <dgm:spPr/>
-      <dgm:t>
-        <a:bodyPr/>
-        <a:lstStyle/>
-        <a:p>
-          <a:endParaRPr lang="es-CL"/>
-        </a:p>
-      </dgm:t>
-    </dgm:pt>
     <dgm:pt modelId="{02A34BC0-F8BA-4A89-87A4-4F20079DFD06}">
       <dgm:prSet phldrT="[Texto]"/>
       <dgm:spPr/>
@@ -1681,10 +1706,10 @@
         <a:lstStyle/>
         <a:p>
           <a:r>
-            <a:rPr lang="es-MX" dirty="0"/>
+            <a:rPr lang="es-MX"/>
             <a:t>Francisco Castro Astudillo</a:t>
           </a:r>
-          <a:endParaRPr lang="es-CL" dirty="0"/>
+          <a:endParaRPr lang="es-CL"/>
         </a:p>
       </dgm:t>
     </dgm:pt>
@@ -1700,117 +1725,6 @@
       </dgm:t>
     </dgm:pt>
     <dgm:pt modelId="{44AB630E-CD8B-4223-9F51-5EEE4E054B0A}" type="sibTrans" cxnId="{0E2AE979-A66C-4CEC-BFF4-5B28BB7CD9EA}">
-      <dgm:prSet/>
-      <dgm:spPr/>
-      <dgm:t>
-        <a:bodyPr/>
-        <a:lstStyle/>
-        <a:p>
-          <a:endParaRPr lang="es-CL"/>
-        </a:p>
-      </dgm:t>
-    </dgm:pt>
-    <dgm:pt modelId="{2E221207-005F-49CB-81E1-6D036D64322B}">
-      <dgm:prSet phldrT="[Texto]"/>
-      <dgm:spPr/>
-      <dgm:t>
-        <a:bodyPr/>
-        <a:lstStyle/>
-        <a:p>
-          <a:r>
-            <a:rPr lang="es-MX" dirty="0"/>
-            <a:t>Funciones desempeñadas</a:t>
-          </a:r>
-          <a:endParaRPr lang="es-CL" dirty="0"/>
-        </a:p>
-      </dgm:t>
-    </dgm:pt>
-    <dgm:pt modelId="{3728DB5E-E904-481D-A1E5-49CF4AFFC0D3}" type="sibTrans" cxnId="{1C3272C9-C630-4D60-B76B-138907BB4D41}">
-      <dgm:prSet/>
-      <dgm:spPr/>
-      <dgm:t>
-        <a:bodyPr/>
-        <a:lstStyle/>
-        <a:p>
-          <a:endParaRPr lang="es-CL"/>
-        </a:p>
-      </dgm:t>
-    </dgm:pt>
-    <dgm:pt modelId="{B200B6AA-AA2A-4CB8-80FF-4BB54938E8A5}" type="parTrans" cxnId="{1C3272C9-C630-4D60-B76B-138907BB4D41}">
-      <dgm:prSet/>
-      <dgm:spPr/>
-      <dgm:t>
-        <a:bodyPr/>
-        <a:lstStyle/>
-        <a:p>
-          <a:endParaRPr lang="es-CL"/>
-        </a:p>
-      </dgm:t>
-    </dgm:pt>
-    <dgm:pt modelId="{EA3B2395-55AF-495E-9D6B-329D2886612F}">
-      <dgm:prSet phldrT="[Texto]"/>
-      <dgm:spPr/>
-      <dgm:t>
-        <a:bodyPr/>
-        <a:lstStyle/>
-        <a:p>
-          <a:r>
-            <a:rPr lang="es-MX" dirty="0"/>
-            <a:t>Cargo</a:t>
-          </a:r>
-          <a:endParaRPr lang="es-CL" dirty="0"/>
-        </a:p>
-      </dgm:t>
-    </dgm:pt>
-    <dgm:pt modelId="{11A4E056-7834-4F82-8A9C-B8EA31F159E3}" type="sibTrans" cxnId="{778F2DBC-81F3-476D-BD99-784E4F7153C8}">
-      <dgm:prSet/>
-      <dgm:spPr/>
-      <dgm:t>
-        <a:bodyPr/>
-        <a:lstStyle/>
-        <a:p>
-          <a:endParaRPr lang="es-CL"/>
-        </a:p>
-      </dgm:t>
-    </dgm:pt>
-    <dgm:pt modelId="{01DA10B6-3F7A-4C8A-AACD-F605EE6CCF20}" type="parTrans" cxnId="{778F2DBC-81F3-476D-BD99-784E4F7153C8}">
-      <dgm:prSet/>
-      <dgm:spPr/>
-      <dgm:t>
-        <a:bodyPr/>
-        <a:lstStyle/>
-        <a:p>
-          <a:endParaRPr lang="es-CL"/>
-        </a:p>
-      </dgm:t>
-    </dgm:pt>
-    <dgm:pt modelId="{55A2A9EB-4C26-43C3-B721-D475B10BC39B}">
-      <dgm:prSet phldrT="[Texto]"/>
-      <dgm:spPr/>
-      <dgm:t>
-        <a:bodyPr/>
-        <a:lstStyle/>
-        <a:p>
-          <a:r>
-            <a:rPr lang="es-MX" dirty="0"/>
-            <a:t>Funciones desempeñadas</a:t>
-          </a:r>
-          <a:endParaRPr lang="es-CL" dirty="0"/>
-        </a:p>
-      </dgm:t>
-    </dgm:pt>
-    <dgm:pt modelId="{4EF4588A-187C-4393-9DFC-C6D80B20E995}" type="sibTrans" cxnId="{ECED70CB-7A25-48F8-9E03-51596FB1E92C}">
-      <dgm:prSet/>
-      <dgm:spPr/>
-      <dgm:t>
-        <a:bodyPr/>
-        <a:lstStyle/>
-        <a:p>
-          <a:endParaRPr lang="es-CL"/>
-        </a:p>
-      </dgm:t>
-    </dgm:pt>
-    <dgm:pt modelId="{B8424EB2-FFE7-4867-9D5A-EE0D46E8AAFE}" type="parTrans" cxnId="{ECED70CB-7A25-48F8-9E03-51596FB1E92C}">
       <dgm:prSet/>
       <dgm:spPr/>
       <dgm:t>
@@ -1876,25 +1790,13 @@
     </dgm:pt>
   </dgm:ptLst>
   <dgm:cxnLst>
-    <dgm:cxn modelId="{399BD705-2380-48A3-9C48-1D49A5A32D61}" type="presOf" srcId="{2E221207-005F-49CB-81E1-6D036D64322B}" destId="{52D125D2-FCA7-4A2D-AB39-B6BD54F251F2}" srcOrd="1" destOrd="2" presId="urn:microsoft.com/office/officeart/2005/8/layout/vList4"/>
     <dgm:cxn modelId="{D2B94F0C-C779-4AC1-87E4-35116A3DED02}" type="presOf" srcId="{78BFB295-8F5D-4286-B72B-79142F8F0E13}" destId="{54FC4CB6-0791-48D3-B2C5-2E99B8AFCFF7}" srcOrd="0" destOrd="0" presId="urn:microsoft.com/office/officeart/2005/8/layout/vList4"/>
     <dgm:cxn modelId="{A6E20436-8EF1-4FFF-9C29-AC69BF1D5C4A}" type="presOf" srcId="{02A34BC0-F8BA-4A89-87A4-4F20079DFD06}" destId="{39AFE128-ACF6-44CA-B18B-64F5782CF210}" srcOrd="0" destOrd="0" presId="urn:microsoft.com/office/officeart/2005/8/layout/vList4"/>
-    <dgm:cxn modelId="{484B8A37-0122-4FF5-93D2-4A15DF521A17}" srcId="{78BFB295-8F5D-4286-B72B-79142F8F0E13}" destId="{D868444B-AE34-4422-A6A5-1F7D392D0C20}" srcOrd="0" destOrd="0" parTransId="{7DB88D83-6C3A-48C1-8CAD-0D11C3BEC35C}" sibTransId="{74B9B1A5-94EB-40A9-BFF2-678501068FB8}"/>
-    <dgm:cxn modelId="{22F3405C-AB8E-4AC3-A83C-C551BA0831ED}" type="presOf" srcId="{55A2A9EB-4C26-43C3-B721-D475B10BC39B}" destId="{39AFE128-ACF6-44CA-B18B-64F5782CF210}" srcOrd="0" destOrd="2" presId="urn:microsoft.com/office/officeart/2005/8/layout/vList4"/>
-    <dgm:cxn modelId="{7E8FC05E-FE02-4336-B1F8-3EAA05519A49}" type="presOf" srcId="{D868444B-AE34-4422-A6A5-1F7D392D0C20}" destId="{54FC4CB6-0791-48D3-B2C5-2E99B8AFCFF7}" srcOrd="0" destOrd="1" presId="urn:microsoft.com/office/officeart/2005/8/layout/vList4"/>
-    <dgm:cxn modelId="{DC02AD53-682D-464B-9D09-C1B6DCD5AFB0}" type="presOf" srcId="{55A2A9EB-4C26-43C3-B721-D475B10BC39B}" destId="{CFFDF23F-D296-4CDF-8EE4-8A672559E207}" srcOrd="1" destOrd="2" presId="urn:microsoft.com/office/officeart/2005/8/layout/vList4"/>
     <dgm:cxn modelId="{0E2AE979-A66C-4CEC-BFF4-5B28BB7CD9EA}" srcId="{BE45140C-C326-4DAA-A267-498AD5117D68}" destId="{02A34BC0-F8BA-4A89-87A4-4F20079DFD06}" srcOrd="1" destOrd="0" parTransId="{9ADB496F-2DB6-4F16-8C91-2EB9CDF5F2F2}" sibTransId="{44AB630E-CD8B-4223-9F51-5EEE4E054B0A}"/>
     <dgm:cxn modelId="{2AD07198-D472-4B98-B6D5-5A730374E9A2}" srcId="{BE45140C-C326-4DAA-A267-498AD5117D68}" destId="{78BFB295-8F5D-4286-B72B-79142F8F0E13}" srcOrd="0" destOrd="0" parTransId="{F1885FAB-61EC-4F80-98D0-72360031AF9F}" sibTransId="{E88D0928-51D4-4670-8963-60ABBB193E13}"/>
     <dgm:cxn modelId="{690A389C-25C1-485B-88F9-437236A47744}" type="presOf" srcId="{BE45140C-C326-4DAA-A267-498AD5117D68}" destId="{6E1E561E-88C1-49C6-A3F7-DE4B9AD43273}" srcOrd="0" destOrd="0" presId="urn:microsoft.com/office/officeart/2005/8/layout/vList4"/>
     <dgm:cxn modelId="{ECFD91A4-F44F-4C84-8B25-37DA0B249A1F}" type="presOf" srcId="{78BFB295-8F5D-4286-B72B-79142F8F0E13}" destId="{52D125D2-FCA7-4A2D-AB39-B6BD54F251F2}" srcOrd="1" destOrd="0" presId="urn:microsoft.com/office/officeart/2005/8/layout/vList4"/>
-    <dgm:cxn modelId="{778F2DBC-81F3-476D-BD99-784E4F7153C8}" srcId="{02A34BC0-F8BA-4A89-87A4-4F20079DFD06}" destId="{EA3B2395-55AF-495E-9D6B-329D2886612F}" srcOrd="0" destOrd="0" parTransId="{01DA10B6-3F7A-4C8A-AACD-F605EE6CCF20}" sibTransId="{11A4E056-7834-4F82-8A9C-B8EA31F159E3}"/>
-    <dgm:cxn modelId="{FE5360C5-555C-42B2-9E63-16D2D46F21B1}" type="presOf" srcId="{D868444B-AE34-4422-A6A5-1F7D392D0C20}" destId="{52D125D2-FCA7-4A2D-AB39-B6BD54F251F2}" srcOrd="1" destOrd="1" presId="urn:microsoft.com/office/officeart/2005/8/layout/vList4"/>
-    <dgm:cxn modelId="{1C3272C9-C630-4D60-B76B-138907BB4D41}" srcId="{78BFB295-8F5D-4286-B72B-79142F8F0E13}" destId="{2E221207-005F-49CB-81E1-6D036D64322B}" srcOrd="1" destOrd="0" parTransId="{B200B6AA-AA2A-4CB8-80FF-4BB54938E8A5}" sibTransId="{3728DB5E-E904-481D-A1E5-49CF4AFFC0D3}"/>
-    <dgm:cxn modelId="{B0C181C9-77EB-4775-B9E6-C6CBDA60E6EB}" type="presOf" srcId="{EA3B2395-55AF-495E-9D6B-329D2886612F}" destId="{CFFDF23F-D296-4CDF-8EE4-8A672559E207}" srcOrd="1" destOrd="1" presId="urn:microsoft.com/office/officeart/2005/8/layout/vList4"/>
-    <dgm:cxn modelId="{ECED70CB-7A25-48F8-9E03-51596FB1E92C}" srcId="{02A34BC0-F8BA-4A89-87A4-4F20079DFD06}" destId="{55A2A9EB-4C26-43C3-B721-D475B10BC39B}" srcOrd="1" destOrd="0" parTransId="{B8424EB2-FFE7-4867-9D5A-EE0D46E8AAFE}" sibTransId="{4EF4588A-187C-4393-9DFC-C6D80B20E995}"/>
     <dgm:cxn modelId="{22A4C7D2-C14A-4622-8C4E-3FE51F50DCC3}" type="presOf" srcId="{02A34BC0-F8BA-4A89-87A4-4F20079DFD06}" destId="{CFFDF23F-D296-4CDF-8EE4-8A672559E207}" srcOrd="1" destOrd="0" presId="urn:microsoft.com/office/officeart/2005/8/layout/vList4"/>
-    <dgm:cxn modelId="{A70C9FD5-2935-4C81-937A-B6C05F5E54BA}" type="presOf" srcId="{2E221207-005F-49CB-81E1-6D036D64322B}" destId="{54FC4CB6-0791-48D3-B2C5-2E99B8AFCFF7}" srcOrd="0" destOrd="2" presId="urn:microsoft.com/office/officeart/2005/8/layout/vList4"/>
-    <dgm:cxn modelId="{7ABE08FD-4ED4-44FB-BFBA-794B6C5FA813}" type="presOf" srcId="{EA3B2395-55AF-495E-9D6B-329D2886612F}" destId="{39AFE128-ACF6-44CA-B18B-64F5782CF210}" srcOrd="0" destOrd="1" presId="urn:microsoft.com/office/officeart/2005/8/layout/vList4"/>
     <dgm:cxn modelId="{DA463EE6-78DB-4E59-8099-EBA029F401B0}" type="presParOf" srcId="{6E1E561E-88C1-49C6-A3F7-DE4B9AD43273}" destId="{F70979D0-5925-4EC3-AD84-986E0EC7B0D8}" srcOrd="0" destOrd="0" presId="urn:microsoft.com/office/officeart/2005/8/layout/vList4"/>
     <dgm:cxn modelId="{2FE346D7-6685-4BD0-9465-988681234E35}" type="presParOf" srcId="{F70979D0-5925-4EC3-AD84-986E0EC7B0D8}" destId="{54FC4CB6-0791-48D3-B2C5-2E99B8AFCFF7}" srcOrd="0" destOrd="0" presId="urn:microsoft.com/office/officeart/2005/8/layout/vList4"/>
     <dgm:cxn modelId="{3671DC51-8308-4E14-B210-C8528BB18500}" type="presParOf" srcId="{F70979D0-5925-4EC3-AD84-986E0EC7B0D8}" destId="{9A7E2690-DE9C-4572-9BE5-B8C9A3B8BBB3}" srcOrd="1" destOrd="0" presId="urn:microsoft.com/office/officeart/2005/8/layout/vList4"/>
@@ -2002,12 +1904,12 @@
         </a:fontRef>
       </dsp:style>
       <dsp:txBody>
-        <a:bodyPr spcFirstLastPara="0" vert="horz" wrap="square" lIns="152400" tIns="152400" rIns="152400" bIns="152400" numCol="1" spcCol="1270" anchor="t" anchorCtr="0">
+        <a:bodyPr spcFirstLastPara="0" vert="horz" wrap="square" lIns="220980" tIns="220980" rIns="220980" bIns="220980" numCol="1" spcCol="1270" anchor="ctr" anchorCtr="0">
           <a:noAutofit/>
         </a:bodyPr>
         <a:lstStyle/>
         <a:p>
-          <a:pPr marL="0" lvl="0" indent="0" algn="l" defTabSz="1778000">
+          <a:pPr marL="0" lvl="0" indent="0" algn="l" defTabSz="2578100">
             <a:lnSpc>
               <a:spcPct val="90000"/>
             </a:lnSpc>
@@ -2020,48 +1922,10 @@
             <a:buNone/>
           </a:pPr>
           <a:r>
-            <a:rPr lang="es-ES" sz="4000" kern="1200" dirty="0"/>
+            <a:rPr lang="es-ES" sz="5800" kern="1200"/>
             <a:t>Claudio Marcelo Brito Soto</a:t>
           </a:r>
-          <a:endParaRPr lang="es-CL" sz="4000" kern="1200" dirty="0"/>
-        </a:p>
-        <a:p>
-          <a:pPr marL="285750" lvl="1" indent="-285750" algn="l" defTabSz="1377950">
-            <a:lnSpc>
-              <a:spcPct val="90000"/>
-            </a:lnSpc>
-            <a:spcBef>
-              <a:spcPct val="0"/>
-            </a:spcBef>
-            <a:spcAft>
-              <a:spcPct val="15000"/>
-            </a:spcAft>
-            <a:buChar char="•"/>
-          </a:pPr>
-          <a:r>
-            <a:rPr lang="es-MX" sz="3100" kern="1200" dirty="0"/>
-            <a:t>Cargo</a:t>
-          </a:r>
-          <a:endParaRPr lang="es-CL" sz="3100" kern="1200" dirty="0"/>
-        </a:p>
-        <a:p>
-          <a:pPr marL="285750" lvl="1" indent="-285750" algn="l" defTabSz="1377950">
-            <a:lnSpc>
-              <a:spcPct val="90000"/>
-            </a:lnSpc>
-            <a:spcBef>
-              <a:spcPct val="0"/>
-            </a:spcBef>
-            <a:spcAft>
-              <a:spcPct val="15000"/>
-            </a:spcAft>
-            <a:buChar char="•"/>
-          </a:pPr>
-          <a:r>
-            <a:rPr lang="es-MX" sz="3100" kern="1200" dirty="0"/>
-            <a:t>Funciones desempeñadas</a:t>
-          </a:r>
-          <a:endParaRPr lang="es-CL" sz="3100" kern="1200" dirty="0"/>
+          <a:endParaRPr lang="es-CL" sz="5800" kern="1200"/>
         </a:p>
       </dsp:txBody>
       <dsp:txXfrm>
@@ -2196,12 +2060,12 @@
         </a:fontRef>
       </dsp:style>
       <dsp:txBody>
-        <a:bodyPr spcFirstLastPara="0" vert="horz" wrap="square" lIns="152400" tIns="152400" rIns="152400" bIns="152400" numCol="1" spcCol="1270" anchor="t" anchorCtr="0">
+        <a:bodyPr spcFirstLastPara="0" vert="horz" wrap="square" lIns="220980" tIns="220980" rIns="220980" bIns="220980" numCol="1" spcCol="1270" anchor="ctr" anchorCtr="0">
           <a:noAutofit/>
         </a:bodyPr>
         <a:lstStyle/>
         <a:p>
-          <a:pPr marL="0" lvl="0" indent="0" algn="l" defTabSz="1778000">
+          <a:pPr marL="0" lvl="0" indent="0" algn="l" defTabSz="2578100">
             <a:lnSpc>
               <a:spcPct val="90000"/>
             </a:lnSpc>
@@ -2214,48 +2078,10 @@
             <a:buNone/>
           </a:pPr>
           <a:r>
-            <a:rPr lang="es-MX" sz="4000" kern="1200" dirty="0"/>
+            <a:rPr lang="es-MX" sz="5800" kern="1200"/>
             <a:t>Francisco Castro Astudillo</a:t>
           </a:r>
-          <a:endParaRPr lang="es-CL" sz="4000" kern="1200" dirty="0"/>
-        </a:p>
-        <a:p>
-          <a:pPr marL="285750" lvl="1" indent="-285750" algn="l" defTabSz="1377950">
-            <a:lnSpc>
-              <a:spcPct val="90000"/>
-            </a:lnSpc>
-            <a:spcBef>
-              <a:spcPct val="0"/>
-            </a:spcBef>
-            <a:spcAft>
-              <a:spcPct val="15000"/>
-            </a:spcAft>
-            <a:buChar char="•"/>
-          </a:pPr>
-          <a:r>
-            <a:rPr lang="es-MX" sz="3100" kern="1200" dirty="0"/>
-            <a:t>Cargo</a:t>
-          </a:r>
-          <a:endParaRPr lang="es-CL" sz="3100" kern="1200" dirty="0"/>
-        </a:p>
-        <a:p>
-          <a:pPr marL="285750" lvl="1" indent="-285750" algn="l" defTabSz="1377950">
-            <a:lnSpc>
-              <a:spcPct val="90000"/>
-            </a:lnSpc>
-            <a:spcBef>
-              <a:spcPct val="0"/>
-            </a:spcBef>
-            <a:spcAft>
-              <a:spcPct val="15000"/>
-            </a:spcAft>
-            <a:buChar char="•"/>
-          </a:pPr>
-          <a:r>
-            <a:rPr lang="es-MX" sz="3100" kern="1200" dirty="0"/>
-            <a:t>Funciones desempeñadas</a:t>
-          </a:r>
-          <a:endParaRPr lang="es-CL" sz="3100" kern="1200" dirty="0"/>
+          <a:endParaRPr lang="es-CL" sz="5800" kern="1200"/>
         </a:p>
       </dsp:txBody>
       <dsp:txXfrm>
@@ -3638,7 +3464,7 @@
           <a:p>
             <a:fld id="{0EF2A6A9-0F13-4139-AE59-408216CEF517}" type="datetimeFigureOut">
               <a:rPr lang="es-CL" smtClean="0"/>
-              <a:t>20-11-2025</a:t>
+              <a:t>24-11-2025</a:t>
             </a:fld>
             <a:endParaRPr lang="es-CL"/>
           </a:p>
@@ -3951,105 +3777,888 @@
           <a:lstStyle/>
           <a:p>
             <a:r>
-              <a:rPr lang="es-ES" dirty="0"/>
+              <a:rPr lang="es-CL"/>
+              <a:t>FC</a:t>
+            </a:r>
+          </a:p>
+        </p:txBody>
+      </p:sp>
+      <p:sp>
+        <p:nvSpPr>
+          <p:cNvPr id="4" name="Marcador de número de diapositiva 3"/>
+          <p:cNvSpPr>
+            <a:spLocks noGrp="1"/>
+          </p:cNvSpPr>
+          <p:nvPr>
+            <p:ph type="sldNum" sz="quarter" idx="5"/>
+          </p:nvPr>
+        </p:nvSpPr>
+        <p:spPr/>
+        <p:txBody>
+          <a:bodyPr/>
+          <a:lstStyle/>
+          <a:p>
+            <a:fld id="{E9C9140C-50D1-40A6-8AA2-F5C484FCB43B}" type="slidenum">
+              <a:rPr lang="es-CL" smtClean="0"/>
+              <a:t>3</a:t>
+            </a:fld>
+            <a:endParaRPr lang="es-CL"/>
+          </a:p>
+        </p:txBody>
+      </p:sp>
+    </p:spTree>
+    <p:extLst>
+      <p:ext uri="{BB962C8B-B14F-4D97-AF65-F5344CB8AC3E}">
+        <p14:creationId xmlns:p14="http://schemas.microsoft.com/office/powerpoint/2010/main" val="3718280245"/>
+      </p:ext>
+    </p:extLst>
+  </p:cSld>
+  <p:clrMapOvr>
+    <a:masterClrMapping/>
+  </p:clrMapOvr>
+</p:notes>
+</file>
+
+<file path=ppt/notesSlides/notesSlide10.xml><?xml version="1.0" encoding="utf-8"?>
+<p:notes xmlns:a="http://schemas.openxmlformats.org/drawingml/2006/main" xmlns:r="http://schemas.openxmlformats.org/officeDocument/2006/relationships" xmlns:p="http://schemas.openxmlformats.org/presentationml/2006/main">
+  <p:cSld>
+    <p:spTree>
+      <p:nvGrpSpPr>
+        <p:cNvPr id="1" name=""/>
+        <p:cNvGrpSpPr/>
+        <p:nvPr/>
+      </p:nvGrpSpPr>
+      <p:grpSpPr>
+        <a:xfrm>
+          <a:off x="0" y="0"/>
+          <a:ext cx="0" cy="0"/>
+          <a:chOff x="0" y="0"/>
+          <a:chExt cx="0" cy="0"/>
+        </a:xfrm>
+      </p:grpSpPr>
+      <p:sp>
+        <p:nvSpPr>
+          <p:cNvPr id="2" name="Marcador de imagen de diapositiva 1"/>
+          <p:cNvSpPr>
+            <a:spLocks noGrp="1" noRot="1" noChangeAspect="1"/>
+          </p:cNvSpPr>
+          <p:nvPr>
+            <p:ph type="sldImg"/>
+          </p:nvPr>
+        </p:nvSpPr>
+        <p:spPr/>
+      </p:sp>
+      <p:sp>
+        <p:nvSpPr>
+          <p:cNvPr id="3" name="Marcador de notas 2"/>
+          <p:cNvSpPr>
+            <a:spLocks noGrp="1"/>
+          </p:cNvSpPr>
+          <p:nvPr>
+            <p:ph type="body" idx="1"/>
+          </p:nvPr>
+        </p:nvSpPr>
+        <p:spPr/>
+        <p:txBody>
+          <a:bodyPr/>
+          <a:lstStyle/>
+          <a:p>
+            <a:r>
+              <a:rPr lang="es-CL"/>
+              <a:t>FC</a:t>
+            </a:r>
+          </a:p>
+        </p:txBody>
+      </p:sp>
+      <p:sp>
+        <p:nvSpPr>
+          <p:cNvPr id="4" name="Marcador de número de diapositiva 3"/>
+          <p:cNvSpPr>
+            <a:spLocks noGrp="1"/>
+          </p:cNvSpPr>
+          <p:nvPr>
+            <p:ph type="sldNum" sz="quarter" idx="5"/>
+          </p:nvPr>
+        </p:nvSpPr>
+        <p:spPr/>
+        <p:txBody>
+          <a:bodyPr/>
+          <a:lstStyle/>
+          <a:p>
+            <a:fld id="{E8F839A7-8FC4-4B61-8042-45DF58DFB10A}" type="slidenum">
+              <a:rPr lang="es-CL" smtClean="0"/>
+              <a:t>13</a:t>
+            </a:fld>
+            <a:endParaRPr lang="es-CL"/>
+          </a:p>
+        </p:txBody>
+      </p:sp>
+    </p:spTree>
+    <p:extLst>
+      <p:ext uri="{BB962C8B-B14F-4D97-AF65-F5344CB8AC3E}">
+        <p14:creationId xmlns:p14="http://schemas.microsoft.com/office/powerpoint/2010/main" val="1984312076"/>
+      </p:ext>
+    </p:extLst>
+  </p:cSld>
+  <p:clrMapOvr>
+    <a:masterClrMapping/>
+  </p:clrMapOvr>
+</p:notes>
+</file>
+
+<file path=ppt/notesSlides/notesSlide2.xml><?xml version="1.0" encoding="utf-8"?>
+<p:notes xmlns:a="http://schemas.openxmlformats.org/drawingml/2006/main" xmlns:r="http://schemas.openxmlformats.org/officeDocument/2006/relationships" xmlns:p="http://schemas.openxmlformats.org/presentationml/2006/main">
+  <p:cSld>
+    <p:spTree>
+      <p:nvGrpSpPr>
+        <p:cNvPr id="1" name=""/>
+        <p:cNvGrpSpPr/>
+        <p:nvPr/>
+      </p:nvGrpSpPr>
+      <p:grpSpPr>
+        <a:xfrm>
+          <a:off x="0" y="0"/>
+          <a:ext cx="0" cy="0"/>
+          <a:chOff x="0" y="0"/>
+          <a:chExt cx="0" cy="0"/>
+        </a:xfrm>
+      </p:grpSpPr>
+      <p:sp>
+        <p:nvSpPr>
+          <p:cNvPr id="2" name="Marcador de imagen de diapositiva 1"/>
+          <p:cNvSpPr>
+            <a:spLocks noGrp="1" noRot="1" noChangeAspect="1"/>
+          </p:cNvSpPr>
+          <p:nvPr>
+            <p:ph type="sldImg"/>
+          </p:nvPr>
+        </p:nvSpPr>
+        <p:spPr/>
+      </p:sp>
+      <p:sp>
+        <p:nvSpPr>
+          <p:cNvPr id="3" name="Marcador de notas 2"/>
+          <p:cNvSpPr>
+            <a:spLocks noGrp="1"/>
+          </p:cNvSpPr>
+          <p:nvPr>
+            <p:ph type="body" idx="1"/>
+          </p:nvPr>
+        </p:nvSpPr>
+        <p:spPr/>
+        <p:txBody>
+          <a:bodyPr/>
+          <a:lstStyle/>
+          <a:p>
+            <a:r>
+              <a:rPr lang="es-CL"/>
+              <a:t>FC </a:t>
+            </a:r>
+          </a:p>
+        </p:txBody>
+      </p:sp>
+      <p:sp>
+        <p:nvSpPr>
+          <p:cNvPr id="4" name="Marcador de número de diapositiva 3"/>
+          <p:cNvSpPr>
+            <a:spLocks noGrp="1"/>
+          </p:cNvSpPr>
+          <p:nvPr>
+            <p:ph type="sldNum" sz="quarter" idx="5"/>
+          </p:nvPr>
+        </p:nvSpPr>
+        <p:spPr/>
+        <p:txBody>
+          <a:bodyPr/>
+          <a:lstStyle/>
+          <a:p>
+            <a:fld id="{E9C9140C-50D1-40A6-8AA2-F5C484FCB43B}" type="slidenum">
+              <a:rPr lang="es-CL" smtClean="0"/>
+              <a:t>4</a:t>
+            </a:fld>
+            <a:endParaRPr lang="es-CL"/>
+          </a:p>
+        </p:txBody>
+      </p:sp>
+    </p:spTree>
+    <p:extLst>
+      <p:ext uri="{BB962C8B-B14F-4D97-AF65-F5344CB8AC3E}">
+        <p14:creationId xmlns:p14="http://schemas.microsoft.com/office/powerpoint/2010/main" val="593685079"/>
+      </p:ext>
+    </p:extLst>
+  </p:cSld>
+  <p:clrMapOvr>
+    <a:masterClrMapping/>
+  </p:clrMapOvr>
+</p:notes>
+</file>
+
+<file path=ppt/notesSlides/notesSlide3.xml><?xml version="1.0" encoding="utf-8"?>
+<p:notes xmlns:a="http://schemas.openxmlformats.org/drawingml/2006/main" xmlns:r="http://schemas.openxmlformats.org/officeDocument/2006/relationships" xmlns:p="http://schemas.openxmlformats.org/presentationml/2006/main">
+  <p:cSld>
+    <p:spTree>
+      <p:nvGrpSpPr>
+        <p:cNvPr id="1" name=""/>
+        <p:cNvGrpSpPr/>
+        <p:nvPr/>
+      </p:nvGrpSpPr>
+      <p:grpSpPr>
+        <a:xfrm>
+          <a:off x="0" y="0"/>
+          <a:ext cx="0" cy="0"/>
+          <a:chOff x="0" y="0"/>
+          <a:chExt cx="0" cy="0"/>
+        </a:xfrm>
+      </p:grpSpPr>
+      <p:sp>
+        <p:nvSpPr>
+          <p:cNvPr id="2" name="Marcador de imagen de diapositiva 1"/>
+          <p:cNvSpPr>
+            <a:spLocks noGrp="1" noRot="1" noChangeAspect="1"/>
+          </p:cNvSpPr>
+          <p:nvPr>
+            <p:ph type="sldImg"/>
+          </p:nvPr>
+        </p:nvSpPr>
+        <p:spPr/>
+      </p:sp>
+      <p:sp>
+        <p:nvSpPr>
+          <p:cNvPr id="3" name="Marcador de notas 2"/>
+          <p:cNvSpPr>
+            <a:spLocks noGrp="1"/>
+          </p:cNvSpPr>
+          <p:nvPr>
+            <p:ph type="body" idx="1"/>
+          </p:nvPr>
+        </p:nvSpPr>
+        <p:spPr/>
+        <p:txBody>
+          <a:bodyPr/>
+          <a:lstStyle/>
+          <a:p>
+            <a:r>
+              <a:rPr lang="es-CL"/>
+              <a:t>CB</a:t>
+            </a:r>
+          </a:p>
+        </p:txBody>
+      </p:sp>
+      <p:sp>
+        <p:nvSpPr>
+          <p:cNvPr id="4" name="Marcador de número de diapositiva 3"/>
+          <p:cNvSpPr>
+            <a:spLocks noGrp="1"/>
+          </p:cNvSpPr>
+          <p:nvPr>
+            <p:ph type="sldNum" sz="quarter" idx="5"/>
+          </p:nvPr>
+        </p:nvSpPr>
+        <p:spPr/>
+        <p:txBody>
+          <a:bodyPr/>
+          <a:lstStyle/>
+          <a:p>
+            <a:fld id="{E9C9140C-50D1-40A6-8AA2-F5C484FCB43B}" type="slidenum">
+              <a:rPr lang="es-CL" smtClean="0"/>
+              <a:t>5</a:t>
+            </a:fld>
+            <a:endParaRPr lang="es-CL"/>
+          </a:p>
+        </p:txBody>
+      </p:sp>
+    </p:spTree>
+    <p:extLst>
+      <p:ext uri="{BB962C8B-B14F-4D97-AF65-F5344CB8AC3E}">
+        <p14:creationId xmlns:p14="http://schemas.microsoft.com/office/powerpoint/2010/main" val="1935001927"/>
+      </p:ext>
+    </p:extLst>
+  </p:cSld>
+  <p:clrMapOvr>
+    <a:masterClrMapping/>
+  </p:clrMapOvr>
+</p:notes>
+</file>
+
+<file path=ppt/notesSlides/notesSlide4.xml><?xml version="1.0" encoding="utf-8"?>
+<p:notes xmlns:a="http://schemas.openxmlformats.org/drawingml/2006/main" xmlns:r="http://schemas.openxmlformats.org/officeDocument/2006/relationships" xmlns:p="http://schemas.openxmlformats.org/presentationml/2006/main">
+  <p:cSld>
+    <p:spTree>
+      <p:nvGrpSpPr>
+        <p:cNvPr id="1" name=""/>
+        <p:cNvGrpSpPr/>
+        <p:nvPr/>
+      </p:nvGrpSpPr>
+      <p:grpSpPr>
+        <a:xfrm>
+          <a:off x="0" y="0"/>
+          <a:ext cx="0" cy="0"/>
+          <a:chOff x="0" y="0"/>
+          <a:chExt cx="0" cy="0"/>
+        </a:xfrm>
+      </p:grpSpPr>
+      <p:sp>
+        <p:nvSpPr>
+          <p:cNvPr id="2" name="Marcador de imagen de diapositiva 1"/>
+          <p:cNvSpPr>
+            <a:spLocks noGrp="1" noRot="1" noChangeAspect="1"/>
+          </p:cNvSpPr>
+          <p:nvPr>
+            <p:ph type="sldImg"/>
+          </p:nvPr>
+        </p:nvSpPr>
+        <p:spPr/>
+      </p:sp>
+      <p:sp>
+        <p:nvSpPr>
+          <p:cNvPr id="3" name="Marcador de notas 2"/>
+          <p:cNvSpPr>
+            <a:spLocks noGrp="1"/>
+          </p:cNvSpPr>
+          <p:nvPr>
+            <p:ph type="body" idx="1"/>
+          </p:nvPr>
+        </p:nvSpPr>
+        <p:spPr/>
+        <p:txBody>
+          <a:bodyPr/>
+          <a:lstStyle/>
+          <a:p>
+            <a:r>
+              <a:rPr lang="es-CL"/>
+              <a:t>FC</a:t>
+            </a:r>
+          </a:p>
+        </p:txBody>
+      </p:sp>
+      <p:sp>
+        <p:nvSpPr>
+          <p:cNvPr id="4" name="Marcador de número de diapositiva 3"/>
+          <p:cNvSpPr>
+            <a:spLocks noGrp="1"/>
+          </p:cNvSpPr>
+          <p:nvPr>
+            <p:ph type="sldNum" sz="quarter" idx="5"/>
+          </p:nvPr>
+        </p:nvSpPr>
+        <p:spPr/>
+        <p:txBody>
+          <a:bodyPr/>
+          <a:lstStyle/>
+          <a:p>
+            <a:fld id="{E9C9140C-50D1-40A6-8AA2-F5C484FCB43B}" type="slidenum">
+              <a:rPr lang="es-CL" smtClean="0"/>
+              <a:t>6</a:t>
+            </a:fld>
+            <a:endParaRPr lang="es-CL"/>
+          </a:p>
+        </p:txBody>
+      </p:sp>
+    </p:spTree>
+    <p:extLst>
+      <p:ext uri="{BB962C8B-B14F-4D97-AF65-F5344CB8AC3E}">
+        <p14:creationId xmlns:p14="http://schemas.microsoft.com/office/powerpoint/2010/main" val="3016299129"/>
+      </p:ext>
+    </p:extLst>
+  </p:cSld>
+  <p:clrMapOvr>
+    <a:masterClrMapping/>
+  </p:clrMapOvr>
+</p:notes>
+</file>
+
+<file path=ppt/notesSlides/notesSlide5.xml><?xml version="1.0" encoding="utf-8"?>
+<p:notes xmlns:a="http://schemas.openxmlformats.org/drawingml/2006/main" xmlns:r="http://schemas.openxmlformats.org/officeDocument/2006/relationships" xmlns:p="http://schemas.openxmlformats.org/presentationml/2006/main">
+  <p:cSld>
+    <p:spTree>
+      <p:nvGrpSpPr>
+        <p:cNvPr id="1" name=""/>
+        <p:cNvGrpSpPr/>
+        <p:nvPr/>
+      </p:nvGrpSpPr>
+      <p:grpSpPr>
+        <a:xfrm>
+          <a:off x="0" y="0"/>
+          <a:ext cx="0" cy="0"/>
+          <a:chOff x="0" y="0"/>
+          <a:chExt cx="0" cy="0"/>
+        </a:xfrm>
+      </p:grpSpPr>
+      <p:sp>
+        <p:nvSpPr>
+          <p:cNvPr id="2" name="Marcador de imagen de diapositiva 1"/>
+          <p:cNvSpPr>
+            <a:spLocks noGrp="1" noRot="1" noChangeAspect="1"/>
+          </p:cNvSpPr>
+          <p:nvPr>
+            <p:ph type="sldImg"/>
+          </p:nvPr>
+        </p:nvSpPr>
+        <p:spPr/>
+      </p:sp>
+      <p:sp>
+        <p:nvSpPr>
+          <p:cNvPr id="3" name="Marcador de notas 2"/>
+          <p:cNvSpPr>
+            <a:spLocks noGrp="1"/>
+          </p:cNvSpPr>
+          <p:nvPr>
+            <p:ph type="body" idx="1"/>
+          </p:nvPr>
+        </p:nvSpPr>
+        <p:spPr/>
+        <p:txBody>
+          <a:bodyPr/>
+          <a:lstStyle/>
+          <a:p>
+            <a:r>
+              <a:rPr lang="es-CL"/>
+              <a:t>CB</a:t>
+            </a:r>
+          </a:p>
+        </p:txBody>
+      </p:sp>
+      <p:sp>
+        <p:nvSpPr>
+          <p:cNvPr id="4" name="Marcador de número de diapositiva 3"/>
+          <p:cNvSpPr>
+            <a:spLocks noGrp="1"/>
+          </p:cNvSpPr>
+          <p:nvPr>
+            <p:ph type="sldNum" sz="quarter" idx="5"/>
+          </p:nvPr>
+        </p:nvSpPr>
+        <p:spPr/>
+        <p:txBody>
+          <a:bodyPr/>
+          <a:lstStyle/>
+          <a:p>
+            <a:fld id="{E8F839A7-8FC4-4B61-8042-45DF58DFB10A}" type="slidenum">
+              <a:rPr lang="es-CL" smtClean="0"/>
+              <a:t>7</a:t>
+            </a:fld>
+            <a:endParaRPr lang="es-CL"/>
+          </a:p>
+        </p:txBody>
+      </p:sp>
+    </p:spTree>
+    <p:extLst>
+      <p:ext uri="{BB962C8B-B14F-4D97-AF65-F5344CB8AC3E}">
+        <p14:creationId xmlns:p14="http://schemas.microsoft.com/office/powerpoint/2010/main" val="3016353964"/>
+      </p:ext>
+    </p:extLst>
+  </p:cSld>
+  <p:clrMapOvr>
+    <a:masterClrMapping/>
+  </p:clrMapOvr>
+</p:notes>
+</file>
+
+<file path=ppt/notesSlides/notesSlide6.xml><?xml version="1.0" encoding="utf-8"?>
+<p:notes xmlns:a="http://schemas.openxmlformats.org/drawingml/2006/main" xmlns:r="http://schemas.openxmlformats.org/officeDocument/2006/relationships" xmlns:p="http://schemas.openxmlformats.org/presentationml/2006/main">
+  <p:cSld>
+    <p:spTree>
+      <p:nvGrpSpPr>
+        <p:cNvPr id="1" name=""/>
+        <p:cNvGrpSpPr/>
+        <p:nvPr/>
+      </p:nvGrpSpPr>
+      <p:grpSpPr>
+        <a:xfrm>
+          <a:off x="0" y="0"/>
+          <a:ext cx="0" cy="0"/>
+          <a:chOff x="0" y="0"/>
+          <a:chExt cx="0" cy="0"/>
+        </a:xfrm>
+      </p:grpSpPr>
+      <p:sp>
+        <p:nvSpPr>
+          <p:cNvPr id="2" name="Marcador de imagen de diapositiva 1"/>
+          <p:cNvSpPr>
+            <a:spLocks noGrp="1" noRot="1" noChangeAspect="1"/>
+          </p:cNvSpPr>
+          <p:nvPr>
+            <p:ph type="sldImg"/>
+          </p:nvPr>
+        </p:nvSpPr>
+        <p:spPr/>
+      </p:sp>
+      <p:sp>
+        <p:nvSpPr>
+          <p:cNvPr id="3" name="Marcador de notas 2"/>
+          <p:cNvSpPr>
+            <a:spLocks noGrp="1"/>
+          </p:cNvSpPr>
+          <p:nvPr>
+            <p:ph type="body" idx="1"/>
+          </p:nvPr>
+        </p:nvSpPr>
+        <p:spPr/>
+        <p:txBody>
+          <a:bodyPr/>
+          <a:lstStyle/>
+          <a:p>
+            <a:r>
+              <a:rPr lang="es-CL"/>
+              <a:t>CB</a:t>
+            </a:r>
+          </a:p>
+        </p:txBody>
+      </p:sp>
+      <p:sp>
+        <p:nvSpPr>
+          <p:cNvPr id="4" name="Marcador de número de diapositiva 3"/>
+          <p:cNvSpPr>
+            <a:spLocks noGrp="1"/>
+          </p:cNvSpPr>
+          <p:nvPr>
+            <p:ph type="sldNum" sz="quarter" idx="5"/>
+          </p:nvPr>
+        </p:nvSpPr>
+        <p:spPr/>
+        <p:txBody>
+          <a:bodyPr/>
+          <a:lstStyle/>
+          <a:p>
+            <a:fld id="{E9C9140C-50D1-40A6-8AA2-F5C484FCB43B}" type="slidenum">
+              <a:rPr lang="es-CL" smtClean="0"/>
+              <a:t>8</a:t>
+            </a:fld>
+            <a:endParaRPr lang="es-CL"/>
+          </a:p>
+        </p:txBody>
+      </p:sp>
+    </p:spTree>
+    <p:extLst>
+      <p:ext uri="{BB962C8B-B14F-4D97-AF65-F5344CB8AC3E}">
+        <p14:creationId xmlns:p14="http://schemas.microsoft.com/office/powerpoint/2010/main" val="2074399896"/>
+      </p:ext>
+    </p:extLst>
+  </p:cSld>
+  <p:clrMapOvr>
+    <a:masterClrMapping/>
+  </p:clrMapOvr>
+</p:notes>
+</file>
+
+<file path=ppt/notesSlides/notesSlide7.xml><?xml version="1.0" encoding="utf-8"?>
+<p:notes xmlns:a="http://schemas.openxmlformats.org/drawingml/2006/main" xmlns:r="http://schemas.openxmlformats.org/officeDocument/2006/relationships" xmlns:p="http://schemas.openxmlformats.org/presentationml/2006/main">
+  <p:cSld>
+    <p:spTree>
+      <p:nvGrpSpPr>
+        <p:cNvPr id="1" name=""/>
+        <p:cNvGrpSpPr/>
+        <p:nvPr/>
+      </p:nvGrpSpPr>
+      <p:grpSpPr>
+        <a:xfrm>
+          <a:off x="0" y="0"/>
+          <a:ext cx="0" cy="0"/>
+          <a:chOff x="0" y="0"/>
+          <a:chExt cx="0" cy="0"/>
+        </a:xfrm>
+      </p:grpSpPr>
+      <p:sp>
+        <p:nvSpPr>
+          <p:cNvPr id="2" name="Marcador de imagen de diapositiva 1"/>
+          <p:cNvSpPr>
+            <a:spLocks noGrp="1" noRot="1" noChangeAspect="1"/>
+          </p:cNvSpPr>
+          <p:nvPr>
+            <p:ph type="sldImg"/>
+          </p:nvPr>
+        </p:nvSpPr>
+        <p:spPr/>
+      </p:sp>
+      <p:sp>
+        <p:nvSpPr>
+          <p:cNvPr id="3" name="Marcador de notas 2"/>
+          <p:cNvSpPr>
+            <a:spLocks noGrp="1"/>
+          </p:cNvSpPr>
+          <p:nvPr>
+            <p:ph type="body" idx="1"/>
+          </p:nvPr>
+        </p:nvSpPr>
+        <p:spPr/>
+        <p:txBody>
+          <a:bodyPr/>
+          <a:lstStyle/>
+          <a:p>
+            <a:r>
+              <a:rPr lang="es-CL"/>
+              <a:t>CB</a:t>
+            </a:r>
+          </a:p>
+        </p:txBody>
+      </p:sp>
+      <p:sp>
+        <p:nvSpPr>
+          <p:cNvPr id="4" name="Marcador de número de diapositiva 3"/>
+          <p:cNvSpPr>
+            <a:spLocks noGrp="1"/>
+          </p:cNvSpPr>
+          <p:nvPr>
+            <p:ph type="sldNum" sz="quarter" idx="5"/>
+          </p:nvPr>
+        </p:nvSpPr>
+        <p:spPr/>
+        <p:txBody>
+          <a:bodyPr/>
+          <a:lstStyle/>
+          <a:p>
+            <a:fld id="{E9C9140C-50D1-40A6-8AA2-F5C484FCB43B}" type="slidenum">
+              <a:rPr lang="es-CL" smtClean="0"/>
+              <a:t>9</a:t>
+            </a:fld>
+            <a:endParaRPr lang="es-CL"/>
+          </a:p>
+        </p:txBody>
+      </p:sp>
+    </p:spTree>
+    <p:extLst>
+      <p:ext uri="{BB962C8B-B14F-4D97-AF65-F5344CB8AC3E}">
+        <p14:creationId xmlns:p14="http://schemas.microsoft.com/office/powerpoint/2010/main" val="691438787"/>
+      </p:ext>
+    </p:extLst>
+  </p:cSld>
+  <p:clrMapOvr>
+    <a:masterClrMapping/>
+  </p:clrMapOvr>
+</p:notes>
+</file>
+
+<file path=ppt/notesSlides/notesSlide8.xml><?xml version="1.0" encoding="utf-8"?>
+<p:notes xmlns:a="http://schemas.openxmlformats.org/drawingml/2006/main" xmlns:r="http://schemas.openxmlformats.org/officeDocument/2006/relationships" xmlns:p="http://schemas.openxmlformats.org/presentationml/2006/main">
+  <p:cSld>
+    <p:spTree>
+      <p:nvGrpSpPr>
+        <p:cNvPr id="1" name=""/>
+        <p:cNvGrpSpPr/>
+        <p:nvPr/>
+      </p:nvGrpSpPr>
+      <p:grpSpPr>
+        <a:xfrm>
+          <a:off x="0" y="0"/>
+          <a:ext cx="0" cy="0"/>
+          <a:chOff x="0" y="0"/>
+          <a:chExt cx="0" cy="0"/>
+        </a:xfrm>
+      </p:grpSpPr>
+      <p:sp>
+        <p:nvSpPr>
+          <p:cNvPr id="2" name="Marcador de imagen de diapositiva 1"/>
+          <p:cNvSpPr>
+            <a:spLocks noGrp="1" noRot="1" noChangeAspect="1"/>
+          </p:cNvSpPr>
+          <p:nvPr>
+            <p:ph type="sldImg"/>
+          </p:nvPr>
+        </p:nvSpPr>
+        <p:spPr/>
+      </p:sp>
+      <p:sp>
+        <p:nvSpPr>
+          <p:cNvPr id="3" name="Marcador de notas 2"/>
+          <p:cNvSpPr>
+            <a:spLocks noGrp="1"/>
+          </p:cNvSpPr>
+          <p:nvPr>
+            <p:ph type="body" idx="1"/>
+          </p:nvPr>
+        </p:nvSpPr>
+        <p:spPr/>
+        <p:txBody>
+          <a:bodyPr/>
+          <a:lstStyle/>
+          <a:p>
+            <a:r>
+              <a:rPr lang="es-CL"/>
+              <a:t>CB</a:t>
+            </a:r>
+          </a:p>
+        </p:txBody>
+      </p:sp>
+      <p:sp>
+        <p:nvSpPr>
+          <p:cNvPr id="4" name="Marcador de número de diapositiva 3"/>
+          <p:cNvSpPr>
+            <a:spLocks noGrp="1"/>
+          </p:cNvSpPr>
+          <p:nvPr>
+            <p:ph type="sldNum" sz="quarter" idx="5"/>
+          </p:nvPr>
+        </p:nvSpPr>
+        <p:spPr/>
+        <p:txBody>
+          <a:bodyPr/>
+          <a:lstStyle/>
+          <a:p>
+            <a:fld id="{E9C9140C-50D1-40A6-8AA2-F5C484FCB43B}" type="slidenum">
+              <a:rPr lang="es-CL" smtClean="0"/>
+              <a:t>10</a:t>
+            </a:fld>
+            <a:endParaRPr lang="es-CL"/>
+          </a:p>
+        </p:txBody>
+      </p:sp>
+    </p:spTree>
+    <p:extLst>
+      <p:ext uri="{BB962C8B-B14F-4D97-AF65-F5344CB8AC3E}">
+        <p14:creationId xmlns:p14="http://schemas.microsoft.com/office/powerpoint/2010/main" val="1353010069"/>
+      </p:ext>
+    </p:extLst>
+  </p:cSld>
+  <p:clrMapOvr>
+    <a:masterClrMapping/>
+  </p:clrMapOvr>
+</p:notes>
+</file>
+
+<file path=ppt/notesSlides/notesSlide9.xml><?xml version="1.0" encoding="utf-8"?>
+<p:notes xmlns:a="http://schemas.openxmlformats.org/drawingml/2006/main" xmlns:r="http://schemas.openxmlformats.org/officeDocument/2006/relationships" xmlns:p="http://schemas.openxmlformats.org/presentationml/2006/main">
+  <p:cSld>
+    <p:spTree>
+      <p:nvGrpSpPr>
+        <p:cNvPr id="1" name=""/>
+        <p:cNvGrpSpPr/>
+        <p:nvPr/>
+      </p:nvGrpSpPr>
+      <p:grpSpPr>
+        <a:xfrm>
+          <a:off x="0" y="0"/>
+          <a:ext cx="0" cy="0"/>
+          <a:chOff x="0" y="0"/>
+          <a:chExt cx="0" cy="0"/>
+        </a:xfrm>
+      </p:grpSpPr>
+      <p:sp>
+        <p:nvSpPr>
+          <p:cNvPr id="2" name="Marcador de imagen de diapositiva 1"/>
+          <p:cNvSpPr>
+            <a:spLocks noGrp="1" noRot="1" noChangeAspect="1"/>
+          </p:cNvSpPr>
+          <p:nvPr>
+            <p:ph type="sldImg"/>
+          </p:nvPr>
+        </p:nvSpPr>
+        <p:spPr/>
+      </p:sp>
+      <p:sp>
+        <p:nvSpPr>
+          <p:cNvPr id="3" name="Marcador de notas 2"/>
+          <p:cNvSpPr>
+            <a:spLocks noGrp="1"/>
+          </p:cNvSpPr>
+          <p:nvPr>
+            <p:ph type="body" idx="1"/>
+          </p:nvPr>
+        </p:nvSpPr>
+        <p:spPr/>
+        <p:txBody>
+          <a:bodyPr/>
+          <a:lstStyle/>
+          <a:p>
+            <a:r>
+              <a:rPr lang="es-ES"/>
               <a:t>1ero Ubuntu, wsl2 y Docker para entorno de trabajo y almacenamiento (CB)</a:t>
             </a:r>
           </a:p>
           <a:p>
             <a:r>
-              <a:rPr lang="es-ES" dirty="0"/>
+              <a:rPr lang="es-ES"/>
               <a:t>2do VSCode, cursor y </a:t>
             </a:r>
             <a:r>
-              <a:rPr lang="es-ES" dirty="0" err="1"/>
+              <a:rPr lang="es-ES" err="1"/>
               <a:t>github</a:t>
             </a:r>
             <a:r>
-              <a:rPr lang="es-ES" dirty="0"/>
+              <a:rPr lang="es-ES"/>
               <a:t> para codificación y consistencia (CB)</a:t>
             </a:r>
           </a:p>
           <a:p>
             <a:r>
-              <a:rPr lang="es-CL" dirty="0"/>
+              <a:rPr lang="es-CL"/>
               <a:t>3ero </a:t>
             </a:r>
             <a:r>
-              <a:rPr lang="es-CL" dirty="0" err="1"/>
+              <a:rPr lang="es-CL" err="1"/>
               <a:t>datamodeler</a:t>
             </a:r>
             <a:r>
-              <a:rPr lang="es-CL" dirty="0"/>
+              <a:rPr lang="es-CL"/>
               <a:t>, </a:t>
             </a:r>
             <a:r>
-              <a:rPr lang="es-CL" dirty="0" err="1"/>
+              <a:rPr lang="es-CL" err="1"/>
               <a:t>lucidapp</a:t>
             </a:r>
             <a:r>
-              <a:rPr lang="es-CL" dirty="0"/>
+              <a:rPr lang="es-CL"/>
               <a:t> y </a:t>
             </a:r>
             <a:r>
-              <a:rPr lang="es-CL" dirty="0" err="1"/>
+              <a:rPr lang="es-CL" err="1"/>
               <a:t>bizagi</a:t>
             </a:r>
             <a:r>
-              <a:rPr lang="es-CL" dirty="0"/>
+              <a:rPr lang="es-CL"/>
               <a:t> para diagramas (CB)</a:t>
             </a:r>
           </a:p>
           <a:p>
             <a:r>
-              <a:rPr lang="es-CL" dirty="0"/>
+              <a:rPr lang="es-CL"/>
               <a:t>4to Python como lenguaje base de ciencia de datos (FC)</a:t>
             </a:r>
           </a:p>
           <a:p>
             <a:r>
-              <a:rPr lang="es-CL" dirty="0"/>
+              <a:rPr lang="es-CL"/>
               <a:t>5to backend con </a:t>
             </a:r>
             <a:r>
-              <a:rPr lang="es-CL" dirty="0" err="1"/>
+              <a:rPr lang="es-CL" err="1"/>
               <a:t>mysql</a:t>
             </a:r>
             <a:r>
-              <a:rPr lang="es-CL" dirty="0"/>
+              <a:rPr lang="es-CL"/>
               <a:t>, php y </a:t>
             </a:r>
             <a:r>
-              <a:rPr lang="es-CL" dirty="0" err="1"/>
+              <a:rPr lang="es-CL" err="1"/>
               <a:t>phpmailer</a:t>
             </a:r>
             <a:r>
-              <a:rPr lang="es-CL" dirty="0"/>
+              <a:rPr lang="es-CL"/>
               <a:t> (CB)</a:t>
             </a:r>
           </a:p>
           <a:p>
             <a:r>
-              <a:rPr lang="es-CL" dirty="0"/>
+              <a:rPr lang="es-CL"/>
               <a:t>6to Kedro y </a:t>
             </a:r>
             <a:r>
-              <a:rPr lang="es-CL" dirty="0" err="1"/>
+              <a:rPr lang="es-CL" err="1"/>
               <a:t>weas</a:t>
             </a:r>
             <a:r>
-              <a:rPr lang="es-CL" dirty="0"/>
+              <a:rPr lang="es-CL"/>
               <a:t> (FC)</a:t>
             </a:r>
           </a:p>
           <a:p>
             <a:r>
-              <a:rPr lang="es-CL" dirty="0"/>
+              <a:rPr lang="es-CL"/>
               <a:t>7mo Frontend (CB)</a:t>
             </a:r>
           </a:p>
           <a:p>
             <a:r>
-              <a:rPr lang="es-CL" dirty="0"/>
+              <a:rPr lang="es-CL"/>
               <a:t>8vo (FC)</a:t>
             </a:r>
           </a:p>
@@ -4072,7 +4681,7 @@
           <a:p>
             <a:fld id="{E8F839A7-8FC4-4B61-8042-45DF58DFB10A}" type="slidenum">
               <a:rPr lang="es-CL" smtClean="0"/>
-              <a:t>12</a:t>
+              <a:t>11</a:t>
             </a:fld>
             <a:endParaRPr lang="es-CL"/>
           </a:p>
@@ -4240,7 +4849,7 @@
           <a:p>
             <a:fld id="{6E1704C8-43E3-4F4F-BE90-356A640D5754}" type="datetimeFigureOut">
               <a:rPr lang="es-CL" smtClean="0"/>
-              <a:t>20-11-2025</a:t>
+              <a:t>24-11-2025</a:t>
             </a:fld>
             <a:endParaRPr lang="es-CL"/>
           </a:p>
@@ -4443,7 +5052,7 @@
           <a:p>
             <a:fld id="{6E1704C8-43E3-4F4F-BE90-356A640D5754}" type="datetimeFigureOut">
               <a:rPr lang="es-CL" smtClean="0"/>
-              <a:t>20-11-2025</a:t>
+              <a:t>24-11-2025</a:t>
             </a:fld>
             <a:endParaRPr lang="es-CL"/>
           </a:p>
@@ -4656,7 +5265,7 @@
           <a:p>
             <a:fld id="{6E1704C8-43E3-4F4F-BE90-356A640D5754}" type="datetimeFigureOut">
               <a:rPr lang="es-CL" smtClean="0"/>
-              <a:t>20-11-2025</a:t>
+              <a:t>24-11-2025</a:t>
             </a:fld>
             <a:endParaRPr lang="es-CL"/>
           </a:p>
@@ -4859,7 +5468,7 @@
           <a:p>
             <a:fld id="{6E1704C8-43E3-4F4F-BE90-356A640D5754}" type="datetimeFigureOut">
               <a:rPr lang="es-CL" smtClean="0"/>
-              <a:t>20-11-2025</a:t>
+              <a:t>24-11-2025</a:t>
             </a:fld>
             <a:endParaRPr lang="es-CL"/>
           </a:p>
@@ -5138,7 +5747,7 @@
           <a:p>
             <a:fld id="{6E1704C8-43E3-4F4F-BE90-356A640D5754}" type="datetimeFigureOut">
               <a:rPr lang="es-CL" smtClean="0"/>
-              <a:t>20-11-2025</a:t>
+              <a:t>24-11-2025</a:t>
             </a:fld>
             <a:endParaRPr lang="es-CL"/>
           </a:p>
@@ -5409,7 +6018,7 @@
           <a:p>
             <a:fld id="{6E1704C8-43E3-4F4F-BE90-356A640D5754}" type="datetimeFigureOut">
               <a:rPr lang="es-CL" smtClean="0"/>
-              <a:t>20-11-2025</a:t>
+              <a:t>24-11-2025</a:t>
             </a:fld>
             <a:endParaRPr lang="es-CL"/>
           </a:p>
@@ -5827,7 +6436,7 @@
           <a:p>
             <a:fld id="{6E1704C8-43E3-4F4F-BE90-356A640D5754}" type="datetimeFigureOut">
               <a:rPr lang="es-CL" smtClean="0"/>
-              <a:t>20-11-2025</a:t>
+              <a:t>24-11-2025</a:t>
             </a:fld>
             <a:endParaRPr lang="es-CL"/>
           </a:p>
@@ -5972,7 +6581,7 @@
           <a:p>
             <a:fld id="{6E1704C8-43E3-4F4F-BE90-356A640D5754}" type="datetimeFigureOut">
               <a:rPr lang="es-CL" smtClean="0"/>
-              <a:t>20-11-2025</a:t>
+              <a:t>24-11-2025</a:t>
             </a:fld>
             <a:endParaRPr lang="es-CL"/>
           </a:p>
@@ -6088,7 +6697,7 @@
           <a:p>
             <a:fld id="{6E1704C8-43E3-4F4F-BE90-356A640D5754}" type="datetimeFigureOut">
               <a:rPr lang="es-CL" smtClean="0"/>
-              <a:t>20-11-2025</a:t>
+              <a:t>24-11-2025</a:t>
             </a:fld>
             <a:endParaRPr lang="es-CL"/>
           </a:p>
@@ -6404,7 +7013,7 @@
           <a:p>
             <a:fld id="{6E1704C8-43E3-4F4F-BE90-356A640D5754}" type="datetimeFigureOut">
               <a:rPr lang="es-CL" smtClean="0"/>
-              <a:t>20-11-2025</a:t>
+              <a:t>24-11-2025</a:t>
             </a:fld>
             <a:endParaRPr lang="es-CL"/>
           </a:p>
@@ -6696,7 +7305,7 @@
           <a:p>
             <a:fld id="{6E1704C8-43E3-4F4F-BE90-356A640D5754}" type="datetimeFigureOut">
               <a:rPr lang="es-CL" smtClean="0"/>
-              <a:t>20-11-2025</a:t>
+              <a:t>24-11-2025</a:t>
             </a:fld>
             <a:endParaRPr lang="es-CL"/>
           </a:p>
@@ -6942,7 +7551,7 @@
           <a:p>
             <a:fld id="{6E1704C8-43E3-4F4F-BE90-356A640D5754}" type="datetimeFigureOut">
               <a:rPr lang="es-CL" smtClean="0"/>
-              <a:t>20-11-2025</a:t>
+              <a:t>24-11-2025</a:t>
             </a:fld>
             <a:endParaRPr lang="es-CL"/>
           </a:p>
@@ -7439,17 +8048,17 @@
           <a:p>
             <a:pPr algn="ctr"/>
             <a:r>
-              <a:rPr lang="es-MX" sz="4400" dirty="0"/>
+              <a:rPr lang="es-MX" sz="4400"/>
               <a:t>PROYECTO “CompraRata”</a:t>
             </a:r>
           </a:p>
           <a:p>
             <a:pPr algn="ctr"/>
             <a:r>
-              <a:rPr lang="es-MX" sz="2400" dirty="0"/>
+              <a:rPr lang="es-MX" sz="2400"/>
               <a:t>PRESENTACIÓN FINAL CAPSTONE</a:t>
             </a:r>
-            <a:endParaRPr lang="es-CL" sz="2400" dirty="0"/>
+            <a:endParaRPr lang="es-CL" sz="2400"/>
           </a:p>
         </p:txBody>
       </p:sp>
@@ -7531,7 +8140,7 @@
           <p:nvPr/>
         </p:nvPicPr>
         <p:blipFill>
-          <a:blip r:embed="rId2">
+          <a:blip r:embed="rId3">
             <a:extLst>
               <a:ext uri="{28A0092B-C50C-407E-A947-70E740481C1C}">
                 <a14:useLocalDpi xmlns:a14="http://schemas.microsoft.com/office/drawing/2010/main" val="0"/>
@@ -7574,99 +8183,6 @@
 </file>
 
 <file path=ppt/slides/slide11.xml><?xml version="1.0" encoding="utf-8"?>
-<p:sld xmlns:a="http://schemas.openxmlformats.org/drawingml/2006/main" xmlns:r="http://schemas.openxmlformats.org/officeDocument/2006/relationships" xmlns:p="http://schemas.openxmlformats.org/presentationml/2006/main">
-  <p:cSld>
-    <p:spTree>
-      <p:nvGrpSpPr>
-        <p:cNvPr id="1" name=""/>
-        <p:cNvGrpSpPr/>
-        <p:nvPr/>
-      </p:nvGrpSpPr>
-      <p:grpSpPr>
-        <a:xfrm>
-          <a:off x="0" y="0"/>
-          <a:ext cx="0" cy="0"/>
-          <a:chOff x="0" y="0"/>
-          <a:chExt cx="0" cy="0"/>
-        </a:xfrm>
-      </p:grpSpPr>
-      <p:sp>
-        <p:nvSpPr>
-          <p:cNvPr id="2" name="Título 1">
-            <a:extLst>
-              <a:ext uri="{FF2B5EF4-FFF2-40B4-BE49-F238E27FC236}">
-                <a16:creationId xmlns:a16="http://schemas.microsoft.com/office/drawing/2014/main" id="{1130ED9A-555C-09AA-C8E5-B18ED5421E1C}"/>
-              </a:ext>
-            </a:extLst>
-          </p:cNvPr>
-          <p:cNvSpPr>
-            <a:spLocks noGrp="1"/>
-          </p:cNvSpPr>
-          <p:nvPr>
-            <p:ph type="title"/>
-          </p:nvPr>
-        </p:nvSpPr>
-        <p:spPr/>
-        <p:txBody>
-          <a:bodyPr/>
-          <a:lstStyle/>
-          <a:p>
-            <a:endParaRPr lang="es-CL"/>
-          </a:p>
-        </p:txBody>
-      </p:sp>
-      <p:pic>
-        <p:nvPicPr>
-          <p:cNvPr id="5" name="Marcador de contenido 4" descr="Diagrama, Esquemático&#10;&#10;El contenido generado por IA puede ser incorrecto.">
-            <a:extLst>
-              <a:ext uri="{FF2B5EF4-FFF2-40B4-BE49-F238E27FC236}">
-                <a16:creationId xmlns:a16="http://schemas.microsoft.com/office/drawing/2014/main" id="{FAB3B2C9-9371-29FE-2EDB-474C18CCFFD5}"/>
-              </a:ext>
-            </a:extLst>
-          </p:cNvPr>
-          <p:cNvPicPr>
-            <a:picLocks noGrp="1" noChangeAspect="1"/>
-          </p:cNvPicPr>
-          <p:nvPr>
-            <p:ph idx="1"/>
-          </p:nvPr>
-        </p:nvPicPr>
-        <p:blipFill>
-          <a:blip r:embed="rId2">
-            <a:extLst>
-              <a:ext uri="{28A0092B-C50C-407E-A947-70E740481C1C}">
-                <a14:useLocalDpi xmlns:a14="http://schemas.microsoft.com/office/drawing/2010/main" val="0"/>
-              </a:ext>
-            </a:extLst>
-          </a:blip>
-          <a:stretch>
-            <a:fillRect/>
-          </a:stretch>
-        </p:blipFill>
-        <p:spPr>
-          <a:xfrm>
-            <a:off x="1438656" y="926592"/>
-            <a:ext cx="9714952" cy="5906067"/>
-          </a:xfrm>
-        </p:spPr>
-      </p:pic>
-    </p:spTree>
-    <p:extLst>
-      <p:ext uri="{BB962C8B-B14F-4D97-AF65-F5344CB8AC3E}">
-        <p14:creationId xmlns:p14="http://schemas.microsoft.com/office/powerpoint/2010/main" val="2049997801"/>
-      </p:ext>
-    </p:extLst>
-  </p:cSld>
-  <p:clrMapOvr>
-    <a:masterClrMapping/>
-  </p:clrMapOvr>
-  <p:transition spd="slow">
-    <p:wipe/>
-  </p:transition>
-</p:sld>
-</file>
-
-<file path=ppt/slides/slide12.xml><?xml version="1.0" encoding="utf-8"?>
 <p:sld xmlns:a="http://schemas.openxmlformats.org/drawingml/2006/main" xmlns:r="http://schemas.openxmlformats.org/officeDocument/2006/relationships" xmlns:p="http://schemas.openxmlformats.org/presentationml/2006/main">
   <p:cSld>
     <p:spTree>
@@ -7759,7 +8275,7 @@
           <a:lstStyle/>
           <a:p>
             <a:r>
-              <a:rPr lang="es-MX" dirty="0">
+              <a:rPr lang="es-MX">
                 <a:solidFill>
                   <a:schemeClr val="bg2">
                     <a:lumMod val="50000"/>
@@ -7801,7 +8317,7 @@
           <a:p>
             <a:pPr algn="ctr"/>
             <a:r>
-              <a:rPr lang="es-MX" sz="3600" dirty="0"/>
+              <a:rPr lang="es-MX" sz="3600"/>
               <a:t>Tecnologías utilizadas</a:t>
             </a:r>
           </a:p>
@@ -9550,7 +10066,7 @@
 </p:sld>
 </file>
 
-<file path=ppt/slides/slide13.xml><?xml version="1.0" encoding="utf-8"?>
+<file path=ppt/slides/slide12.xml><?xml version="1.0" encoding="utf-8"?>
 <p:sld xmlns:a="http://schemas.openxmlformats.org/drawingml/2006/main" xmlns:r="http://schemas.openxmlformats.org/officeDocument/2006/relationships" xmlns:p="http://schemas.openxmlformats.org/presentationml/2006/main">
   <p:cSld>
     <p:spTree>
@@ -9644,13 +10160,13 @@
           <a:p>
             <a:pPr algn="ctr"/>
             <a:r>
-              <a:rPr lang="es-MX" sz="4400" dirty="0"/>
+              <a:rPr lang="es-MX" sz="4400"/>
               <a:t>DEMOSTRACIÓN DEL RESULTADO DEL PROYECTO</a:t>
             </a:r>
           </a:p>
           <a:p>
             <a:pPr algn="ctr"/>
-            <a:endParaRPr lang="es-CL" sz="2400" dirty="0">
+            <a:endParaRPr lang="es-CL" sz="2400">
               <a:solidFill>
                 <a:schemeClr val="bg2">
                   <a:lumMod val="50000"/>
@@ -9681,7 +10197,7 @@
 </p:sld>
 </file>
 
-<file path=ppt/slides/slide14.xml><?xml version="1.0" encoding="utf-8"?>
+<file path=ppt/slides/slide13.xml><?xml version="1.0" encoding="utf-8"?>
 <p:sld xmlns:a="http://schemas.openxmlformats.org/drawingml/2006/main" xmlns:r="http://schemas.openxmlformats.org/officeDocument/2006/relationships" xmlns:p="http://schemas.openxmlformats.org/presentationml/2006/main">
   <p:cSld>
     <p:spTree>
@@ -9698,12 +10214,677 @@
           <a:chExt cx="0" cy="0"/>
         </a:xfrm>
       </p:grpSpPr>
+      <p:sp>
+        <p:nvSpPr>
+          <p:cNvPr id="2" name="Título 1">
+            <a:extLst>
+              <a:ext uri="{FF2B5EF4-FFF2-40B4-BE49-F238E27FC236}">
+                <a16:creationId xmlns:a16="http://schemas.microsoft.com/office/drawing/2014/main" id="{C0A857BA-7AE1-BC0A-4B0C-CD5A914D1A95}"/>
+              </a:ext>
+            </a:extLst>
+          </p:cNvPr>
+          <p:cNvSpPr>
+            <a:spLocks noGrp="1"/>
+          </p:cNvSpPr>
+          <p:nvPr>
+            <p:ph type="title"/>
+          </p:nvPr>
+        </p:nvSpPr>
+        <p:spPr/>
+        <p:txBody>
+          <a:bodyPr/>
+          <a:lstStyle/>
+          <a:p>
+            <a:endParaRPr lang="es-CL"/>
+          </a:p>
+        </p:txBody>
+      </p:sp>
+      <p:pic>
+        <p:nvPicPr>
+          <p:cNvPr id="5" name="Marcador de contenido 4" descr="Interfaz de usuario gráfica, Aplicación&#10;&#10;El contenido generado por IA puede ser incorrecto.">
+            <a:extLst>
+              <a:ext uri="{FF2B5EF4-FFF2-40B4-BE49-F238E27FC236}">
+                <a16:creationId xmlns:a16="http://schemas.microsoft.com/office/drawing/2014/main" id="{364E9D3B-2337-CF65-FA07-D23A76CB1657}"/>
+              </a:ext>
+            </a:extLst>
+          </p:cNvPr>
+          <p:cNvPicPr>
+            <a:picLocks noGrp="1" noChangeAspect="1"/>
+          </p:cNvPicPr>
+          <p:nvPr>
+            <p:ph idx="1"/>
+          </p:nvPr>
+        </p:nvPicPr>
+        <p:blipFill>
+          <a:blip r:embed="rId3">
+            <a:extLst>
+              <a:ext uri="{28A0092B-C50C-407E-A947-70E740481C1C}">
+                <a14:useLocalDpi xmlns:a14="http://schemas.microsoft.com/office/drawing/2010/main" val="0"/>
+              </a:ext>
+            </a:extLst>
+          </a:blip>
+          <a:stretch>
+            <a:fillRect/>
+          </a:stretch>
+        </p:blipFill>
+        <p:spPr>
+          <a:xfrm>
+            <a:off x="1134153" y="365124"/>
+            <a:ext cx="10165559" cy="5800897"/>
+          </a:xfrm>
+        </p:spPr>
+      </p:pic>
+      <p:pic>
+        <p:nvPicPr>
+          <p:cNvPr id="7" name="Imagen 6" descr="Captura de pantalla de computadora&#10;&#10;El contenido generado por IA puede ser incorrecto.">
+            <a:extLst>
+              <a:ext uri="{FF2B5EF4-FFF2-40B4-BE49-F238E27FC236}">
+                <a16:creationId xmlns:a16="http://schemas.microsoft.com/office/drawing/2014/main" id="{23F9B9B1-9E7C-7761-72BA-D2FF0FCD7AFC}"/>
+              </a:ext>
+            </a:extLst>
+          </p:cNvPr>
+          <p:cNvPicPr>
+            <a:picLocks noChangeAspect="1"/>
+          </p:cNvPicPr>
+          <p:nvPr/>
+        </p:nvPicPr>
+        <p:blipFill>
+          <a:blip r:embed="rId4">
+            <a:extLst>
+              <a:ext uri="{28A0092B-C50C-407E-A947-70E740481C1C}">
+                <a14:useLocalDpi xmlns:a14="http://schemas.microsoft.com/office/drawing/2010/main" val="0"/>
+              </a:ext>
+            </a:extLst>
+          </a:blip>
+          <a:stretch>
+            <a:fillRect/>
+          </a:stretch>
+        </p:blipFill>
+        <p:spPr>
+          <a:xfrm>
+            <a:off x="0" y="300037"/>
+            <a:ext cx="12192000" cy="6257925"/>
+          </a:xfrm>
+          <a:prstGeom prst="rect">
+            <a:avLst/>
+          </a:prstGeom>
+        </p:spPr>
+      </p:pic>
+      <p:pic>
+        <p:nvPicPr>
+          <p:cNvPr id="9" name="Imagen 8" descr="Captura de pantalla de un celular&#10;&#10;El contenido generado por IA puede ser incorrecto.">
+            <a:extLst>
+              <a:ext uri="{FF2B5EF4-FFF2-40B4-BE49-F238E27FC236}">
+                <a16:creationId xmlns:a16="http://schemas.microsoft.com/office/drawing/2014/main" id="{8E1647BB-DE30-89DA-6FD6-7131D3E6905A}"/>
+              </a:ext>
+            </a:extLst>
+          </p:cNvPr>
+          <p:cNvPicPr>
+            <a:picLocks noChangeAspect="1"/>
+          </p:cNvPicPr>
+          <p:nvPr/>
+        </p:nvPicPr>
+        <p:blipFill>
+          <a:blip r:embed="rId5">
+            <a:extLst>
+              <a:ext uri="{28A0092B-C50C-407E-A947-70E740481C1C}">
+                <a14:useLocalDpi xmlns:a14="http://schemas.microsoft.com/office/drawing/2010/main" val="0"/>
+              </a:ext>
+            </a:extLst>
+          </a:blip>
+          <a:stretch>
+            <a:fillRect/>
+          </a:stretch>
+        </p:blipFill>
+        <p:spPr>
+          <a:xfrm>
+            <a:off x="784111" y="231859"/>
+            <a:ext cx="10745437" cy="6326103"/>
+          </a:xfrm>
+          <a:prstGeom prst="rect">
+            <a:avLst/>
+          </a:prstGeom>
+        </p:spPr>
+      </p:pic>
+      <p:pic>
+        <p:nvPicPr>
+          <p:cNvPr id="11" name="Imagen 10" descr="Captura de pantalla de un celular&#10;&#10;El contenido generado por IA puede ser incorrecto.">
+            <a:extLst>
+              <a:ext uri="{FF2B5EF4-FFF2-40B4-BE49-F238E27FC236}">
+                <a16:creationId xmlns:a16="http://schemas.microsoft.com/office/drawing/2014/main" id="{27AA84C0-D6A9-BC68-6A54-58FE5AC96154}"/>
+              </a:ext>
+            </a:extLst>
+          </p:cNvPr>
+          <p:cNvPicPr>
+            <a:picLocks noChangeAspect="1"/>
+          </p:cNvPicPr>
+          <p:nvPr/>
+        </p:nvPicPr>
+        <p:blipFill>
+          <a:blip r:embed="rId6">
+            <a:extLst>
+              <a:ext uri="{28A0092B-C50C-407E-A947-70E740481C1C}">
+                <a14:useLocalDpi xmlns:a14="http://schemas.microsoft.com/office/drawing/2010/main" val="0"/>
+              </a:ext>
+            </a:extLst>
+          </a:blip>
+          <a:stretch>
+            <a:fillRect/>
+          </a:stretch>
+        </p:blipFill>
+        <p:spPr>
+          <a:xfrm>
+            <a:off x="881062" y="214312"/>
+            <a:ext cx="10429875" cy="6429375"/>
+          </a:xfrm>
+          <a:prstGeom prst="rect">
+            <a:avLst/>
+          </a:prstGeom>
+        </p:spPr>
+      </p:pic>
+      <p:pic>
+        <p:nvPicPr>
+          <p:cNvPr id="13" name="Imagen 12" descr="Interfaz de usuario gráfica, Aplicación&#10;&#10;El contenido generado por IA puede ser incorrecto.">
+            <a:extLst>
+              <a:ext uri="{FF2B5EF4-FFF2-40B4-BE49-F238E27FC236}">
+                <a16:creationId xmlns:a16="http://schemas.microsoft.com/office/drawing/2014/main" id="{F872A573-3FAB-4F42-1FAE-EAF6F51036B9}"/>
+              </a:ext>
+            </a:extLst>
+          </p:cNvPr>
+          <p:cNvPicPr>
+            <a:picLocks noChangeAspect="1"/>
+          </p:cNvPicPr>
+          <p:nvPr/>
+        </p:nvPicPr>
+        <p:blipFill>
+          <a:blip r:embed="rId7">
+            <a:extLst>
+              <a:ext uri="{28A0092B-C50C-407E-A947-70E740481C1C}">
+                <a14:useLocalDpi xmlns:a14="http://schemas.microsoft.com/office/drawing/2010/main" val="0"/>
+              </a:ext>
+            </a:extLst>
+          </a:blip>
+          <a:stretch>
+            <a:fillRect/>
+          </a:stretch>
+        </p:blipFill>
+        <p:spPr>
+          <a:xfrm>
+            <a:off x="938212" y="1000125"/>
+            <a:ext cx="10315575" cy="4857750"/>
+          </a:xfrm>
+          <a:prstGeom prst="rect">
+            <a:avLst/>
+          </a:prstGeom>
+        </p:spPr>
+      </p:pic>
+      <p:pic>
+        <p:nvPicPr>
+          <p:cNvPr id="15" name="Imagen 14" descr="Texto&#10;&#10;El contenido generado por IA puede ser incorrecto.">
+            <a:extLst>
+              <a:ext uri="{FF2B5EF4-FFF2-40B4-BE49-F238E27FC236}">
+                <a16:creationId xmlns:a16="http://schemas.microsoft.com/office/drawing/2014/main" id="{E7BFA726-D105-3E06-8704-EC386163BE9B}"/>
+              </a:ext>
+            </a:extLst>
+          </p:cNvPr>
+          <p:cNvPicPr>
+            <a:picLocks noChangeAspect="1"/>
+          </p:cNvPicPr>
+          <p:nvPr/>
+        </p:nvPicPr>
+        <p:blipFill>
+          <a:blip r:embed="rId8">
+            <a:extLst>
+              <a:ext uri="{28A0092B-C50C-407E-A947-70E740481C1C}">
+                <a14:useLocalDpi xmlns:a14="http://schemas.microsoft.com/office/drawing/2010/main" val="0"/>
+              </a:ext>
+            </a:extLst>
+          </a:blip>
+          <a:stretch>
+            <a:fillRect/>
+          </a:stretch>
+        </p:blipFill>
+        <p:spPr>
+          <a:xfrm>
+            <a:off x="1235402" y="0"/>
+            <a:ext cx="9721196" cy="6858000"/>
+          </a:xfrm>
+          <a:prstGeom prst="rect">
+            <a:avLst/>
+          </a:prstGeom>
+        </p:spPr>
+      </p:pic>
+      <p:pic>
+        <p:nvPicPr>
+          <p:cNvPr id="17" name="Imagen 16" descr="Texto&#10;&#10;El contenido generado por IA puede ser incorrecto.">
+            <a:extLst>
+              <a:ext uri="{FF2B5EF4-FFF2-40B4-BE49-F238E27FC236}">
+                <a16:creationId xmlns:a16="http://schemas.microsoft.com/office/drawing/2014/main" id="{6EED29DE-FD1B-A169-8C9B-38A2BBF8B27D}"/>
+              </a:ext>
+            </a:extLst>
+          </p:cNvPr>
+          <p:cNvPicPr>
+            <a:picLocks noChangeAspect="1"/>
+          </p:cNvPicPr>
+          <p:nvPr/>
+        </p:nvPicPr>
+        <p:blipFill>
+          <a:blip r:embed="rId9">
+            <a:extLst>
+              <a:ext uri="{28A0092B-C50C-407E-A947-70E740481C1C}">
+                <a14:useLocalDpi xmlns:a14="http://schemas.microsoft.com/office/drawing/2010/main" val="0"/>
+              </a:ext>
+            </a:extLst>
+          </a:blip>
+          <a:stretch>
+            <a:fillRect/>
+          </a:stretch>
+        </p:blipFill>
+        <p:spPr>
+          <a:xfrm>
+            <a:off x="1320026" y="0"/>
+            <a:ext cx="9551948" cy="6858000"/>
+          </a:xfrm>
+          <a:prstGeom prst="rect">
+            <a:avLst/>
+          </a:prstGeom>
+        </p:spPr>
+      </p:pic>
+    </p:spTree>
+    <p:extLst>
+      <p:ext uri="{BB962C8B-B14F-4D97-AF65-F5344CB8AC3E}">
+        <p14:creationId xmlns:p14="http://schemas.microsoft.com/office/powerpoint/2010/main" val="447901124"/>
+      </p:ext>
+    </p:extLst>
+  </p:cSld>
+  <p:clrMapOvr>
+    <a:masterClrMapping/>
+  </p:clrMapOvr>
+  <mc:AlternateContent xmlns:mc="http://schemas.openxmlformats.org/markup-compatibility/2006" xmlns:p14="http://schemas.microsoft.com/office/powerpoint/2010/main">
+    <mc:Choice Requires="p14">
+      <p:transition p14:dur="0"/>
+    </mc:Choice>
+    <mc:Fallback xmlns="">
+      <p:transition/>
+    </mc:Fallback>
+  </mc:AlternateContent>
+  <p:timing>
+    <p:tnLst>
+      <p:par>
+        <p:cTn id="1" dur="indefinite" restart="never" nodeType="tmRoot">
+          <p:childTnLst>
+            <p:seq concurrent="1" nextAc="seek">
+              <p:cTn id="2" dur="indefinite" nodeType="mainSeq">
+                <p:childTnLst>
+                  <p:par>
+                    <p:cTn id="3" fill="hold">
+                      <p:stCondLst>
+                        <p:cond delay="indefinite"/>
+                      </p:stCondLst>
+                      <p:childTnLst>
+                        <p:par>
+                          <p:cTn id="4" fill="hold">
+                            <p:stCondLst>
+                              <p:cond delay="0"/>
+                            </p:stCondLst>
+                            <p:childTnLst>
+                              <p:par>
+                                <p:cTn id="5" presetID="1" presetClass="entr" presetSubtype="0" fill="hold" nodeType="clickEffect">
+                                  <p:stCondLst>
+                                    <p:cond delay="0"/>
+                                  </p:stCondLst>
+                                  <p:childTnLst>
+                                    <p:set>
+                                      <p:cBhvr>
+                                        <p:cTn id="6" dur="1" fill="hold">
+                                          <p:stCondLst>
+                                            <p:cond delay="0"/>
+                                          </p:stCondLst>
+                                        </p:cTn>
+                                        <p:tgtEl>
+                                          <p:spTgt spid="5"/>
+                                        </p:tgtEl>
+                                        <p:attrNameLst>
+                                          <p:attrName>style.visibility</p:attrName>
+                                        </p:attrNameLst>
+                                      </p:cBhvr>
+                                      <p:to>
+                                        <p:strVal val="visible"/>
+                                      </p:to>
+                                    </p:set>
+                                  </p:childTnLst>
+                                </p:cTn>
+                              </p:par>
+                            </p:childTnLst>
+                          </p:cTn>
+                        </p:par>
+                      </p:childTnLst>
+                    </p:cTn>
+                  </p:par>
+                  <p:par>
+                    <p:cTn id="7" fill="hold">
+                      <p:stCondLst>
+                        <p:cond delay="indefinite"/>
+                      </p:stCondLst>
+                      <p:childTnLst>
+                        <p:par>
+                          <p:cTn id="8" fill="hold">
+                            <p:stCondLst>
+                              <p:cond delay="0"/>
+                            </p:stCondLst>
+                            <p:childTnLst>
+                              <p:par>
+                                <p:cTn id="9" presetID="1" presetClass="entr" presetSubtype="0" fill="hold" nodeType="clickEffect">
+                                  <p:stCondLst>
+                                    <p:cond delay="0"/>
+                                  </p:stCondLst>
+                                  <p:childTnLst>
+                                    <p:set>
+                                      <p:cBhvr>
+                                        <p:cTn id="10" dur="1" fill="hold">
+                                          <p:stCondLst>
+                                            <p:cond delay="0"/>
+                                          </p:stCondLst>
+                                        </p:cTn>
+                                        <p:tgtEl>
+                                          <p:spTgt spid="7"/>
+                                        </p:tgtEl>
+                                        <p:attrNameLst>
+                                          <p:attrName>style.visibility</p:attrName>
+                                        </p:attrNameLst>
+                                      </p:cBhvr>
+                                      <p:to>
+                                        <p:strVal val="visible"/>
+                                      </p:to>
+                                    </p:set>
+                                  </p:childTnLst>
+                                </p:cTn>
+                              </p:par>
+                            </p:childTnLst>
+                          </p:cTn>
+                        </p:par>
+                      </p:childTnLst>
+                    </p:cTn>
+                  </p:par>
+                  <p:par>
+                    <p:cTn id="11" fill="hold">
+                      <p:stCondLst>
+                        <p:cond delay="indefinite"/>
+                      </p:stCondLst>
+                      <p:childTnLst>
+                        <p:par>
+                          <p:cTn id="12" fill="hold">
+                            <p:stCondLst>
+                              <p:cond delay="0"/>
+                            </p:stCondLst>
+                            <p:childTnLst>
+                              <p:par>
+                                <p:cTn id="13" presetID="1" presetClass="entr" presetSubtype="0" fill="hold" nodeType="clickEffect">
+                                  <p:stCondLst>
+                                    <p:cond delay="0"/>
+                                  </p:stCondLst>
+                                  <p:childTnLst>
+                                    <p:set>
+                                      <p:cBhvr>
+                                        <p:cTn id="14" dur="1" fill="hold">
+                                          <p:stCondLst>
+                                            <p:cond delay="0"/>
+                                          </p:stCondLst>
+                                        </p:cTn>
+                                        <p:tgtEl>
+                                          <p:spTgt spid="9"/>
+                                        </p:tgtEl>
+                                        <p:attrNameLst>
+                                          <p:attrName>style.visibility</p:attrName>
+                                        </p:attrNameLst>
+                                      </p:cBhvr>
+                                      <p:to>
+                                        <p:strVal val="visible"/>
+                                      </p:to>
+                                    </p:set>
+                                  </p:childTnLst>
+                                </p:cTn>
+                              </p:par>
+                            </p:childTnLst>
+                          </p:cTn>
+                        </p:par>
+                      </p:childTnLst>
+                    </p:cTn>
+                  </p:par>
+                  <p:par>
+                    <p:cTn id="15" fill="hold">
+                      <p:stCondLst>
+                        <p:cond delay="indefinite"/>
+                      </p:stCondLst>
+                      <p:childTnLst>
+                        <p:par>
+                          <p:cTn id="16" fill="hold">
+                            <p:stCondLst>
+                              <p:cond delay="0"/>
+                            </p:stCondLst>
+                            <p:childTnLst>
+                              <p:par>
+                                <p:cTn id="17" presetID="1" presetClass="entr" presetSubtype="0" fill="hold" nodeType="clickEffect">
+                                  <p:stCondLst>
+                                    <p:cond delay="0"/>
+                                  </p:stCondLst>
+                                  <p:childTnLst>
+                                    <p:set>
+                                      <p:cBhvr>
+                                        <p:cTn id="18" dur="1" fill="hold">
+                                          <p:stCondLst>
+                                            <p:cond delay="0"/>
+                                          </p:stCondLst>
+                                        </p:cTn>
+                                        <p:tgtEl>
+                                          <p:spTgt spid="11"/>
+                                        </p:tgtEl>
+                                        <p:attrNameLst>
+                                          <p:attrName>style.visibility</p:attrName>
+                                        </p:attrNameLst>
+                                      </p:cBhvr>
+                                      <p:to>
+                                        <p:strVal val="visible"/>
+                                      </p:to>
+                                    </p:set>
+                                  </p:childTnLst>
+                                </p:cTn>
+                              </p:par>
+                            </p:childTnLst>
+                          </p:cTn>
+                        </p:par>
+                      </p:childTnLst>
+                    </p:cTn>
+                  </p:par>
+                  <p:par>
+                    <p:cTn id="19" fill="hold">
+                      <p:stCondLst>
+                        <p:cond delay="indefinite"/>
+                      </p:stCondLst>
+                      <p:childTnLst>
+                        <p:par>
+                          <p:cTn id="20" fill="hold">
+                            <p:stCondLst>
+                              <p:cond delay="0"/>
+                            </p:stCondLst>
+                            <p:childTnLst>
+                              <p:par>
+                                <p:cTn id="21" presetID="1" presetClass="entr" presetSubtype="0" fill="hold" nodeType="clickEffect">
+                                  <p:stCondLst>
+                                    <p:cond delay="0"/>
+                                  </p:stCondLst>
+                                  <p:childTnLst>
+                                    <p:set>
+                                      <p:cBhvr>
+                                        <p:cTn id="22" dur="1" fill="hold">
+                                          <p:stCondLst>
+                                            <p:cond delay="0"/>
+                                          </p:stCondLst>
+                                        </p:cTn>
+                                        <p:tgtEl>
+                                          <p:spTgt spid="13"/>
+                                        </p:tgtEl>
+                                        <p:attrNameLst>
+                                          <p:attrName>style.visibility</p:attrName>
+                                        </p:attrNameLst>
+                                      </p:cBhvr>
+                                      <p:to>
+                                        <p:strVal val="visible"/>
+                                      </p:to>
+                                    </p:set>
+                                  </p:childTnLst>
+                                </p:cTn>
+                              </p:par>
+                            </p:childTnLst>
+                          </p:cTn>
+                        </p:par>
+                      </p:childTnLst>
+                    </p:cTn>
+                  </p:par>
+                  <p:par>
+                    <p:cTn id="23" fill="hold">
+                      <p:stCondLst>
+                        <p:cond delay="indefinite"/>
+                      </p:stCondLst>
+                      <p:childTnLst>
+                        <p:par>
+                          <p:cTn id="24" fill="hold">
+                            <p:stCondLst>
+                              <p:cond delay="0"/>
+                            </p:stCondLst>
+                            <p:childTnLst>
+                              <p:par>
+                                <p:cTn id="25" presetID="1" presetClass="entr" presetSubtype="0" fill="hold" nodeType="clickEffect">
+                                  <p:stCondLst>
+                                    <p:cond delay="0"/>
+                                  </p:stCondLst>
+                                  <p:childTnLst>
+                                    <p:set>
+                                      <p:cBhvr>
+                                        <p:cTn id="26" dur="1" fill="hold">
+                                          <p:stCondLst>
+                                            <p:cond delay="0"/>
+                                          </p:stCondLst>
+                                        </p:cTn>
+                                        <p:tgtEl>
+                                          <p:spTgt spid="15"/>
+                                        </p:tgtEl>
+                                        <p:attrNameLst>
+                                          <p:attrName>style.visibility</p:attrName>
+                                        </p:attrNameLst>
+                                      </p:cBhvr>
+                                      <p:to>
+                                        <p:strVal val="visible"/>
+                                      </p:to>
+                                    </p:set>
+                                  </p:childTnLst>
+                                </p:cTn>
+                              </p:par>
+                            </p:childTnLst>
+                          </p:cTn>
+                        </p:par>
+                      </p:childTnLst>
+                    </p:cTn>
+                  </p:par>
+                  <p:par>
+                    <p:cTn id="27" fill="hold">
+                      <p:stCondLst>
+                        <p:cond delay="indefinite"/>
+                      </p:stCondLst>
+                      <p:childTnLst>
+                        <p:par>
+                          <p:cTn id="28" fill="hold">
+                            <p:stCondLst>
+                              <p:cond delay="0"/>
+                            </p:stCondLst>
+                            <p:childTnLst>
+                              <p:par>
+                                <p:cTn id="29" presetID="1" presetClass="entr" presetSubtype="0" fill="hold" nodeType="clickEffect">
+                                  <p:stCondLst>
+                                    <p:cond delay="0"/>
+                                  </p:stCondLst>
+                                  <p:childTnLst>
+                                    <p:set>
+                                      <p:cBhvr>
+                                        <p:cTn id="30" dur="1" fill="hold">
+                                          <p:stCondLst>
+                                            <p:cond delay="0"/>
+                                          </p:stCondLst>
+                                        </p:cTn>
+                                        <p:tgtEl>
+                                          <p:spTgt spid="17"/>
+                                        </p:tgtEl>
+                                        <p:attrNameLst>
+                                          <p:attrName>style.visibility</p:attrName>
+                                        </p:attrNameLst>
+                                      </p:cBhvr>
+                                      <p:to>
+                                        <p:strVal val="visible"/>
+                                      </p:to>
+                                    </p:set>
+                                  </p:childTnLst>
+                                </p:cTn>
+                              </p:par>
+                            </p:childTnLst>
+                          </p:cTn>
+                        </p:par>
+                      </p:childTnLst>
+                    </p:cTn>
+                  </p:par>
+                </p:childTnLst>
+              </p:cTn>
+              <p:prevCondLst>
+                <p:cond evt="onPrev" delay="0">
+                  <p:tgtEl>
+                    <p:sldTgt/>
+                  </p:tgtEl>
+                </p:cond>
+              </p:prevCondLst>
+              <p:nextCondLst>
+                <p:cond evt="onNext" delay="0">
+                  <p:tgtEl>
+                    <p:sldTgt/>
+                  </p:tgtEl>
+                </p:cond>
+              </p:nextCondLst>
+            </p:seq>
+          </p:childTnLst>
+        </p:cTn>
+      </p:par>
+    </p:tnLst>
+  </p:timing>
+</p:sld>
+</file>
+
+<file path=ppt/slides/slide14.xml><?xml version="1.0" encoding="utf-8"?>
+<p:sld xmlns:a="http://schemas.openxmlformats.org/drawingml/2006/main" xmlns:r="http://schemas.openxmlformats.org/officeDocument/2006/relationships" xmlns:p="http://schemas.openxmlformats.org/presentationml/2006/main">
+  <p:cSld>
+    <p:spTree>
+      <p:nvGrpSpPr>
+        <p:cNvPr id="1" name="">
+          <a:extLst>
+            <a:ext uri="{FF2B5EF4-FFF2-40B4-BE49-F238E27FC236}">
+              <a16:creationId xmlns:a16="http://schemas.microsoft.com/office/drawing/2014/main" id="{94442FA5-600C-9303-529D-7F5B5E90B90B}"/>
+            </a:ext>
+          </a:extLst>
+        </p:cNvPr>
+        <p:cNvGrpSpPr/>
+        <p:nvPr/>
+      </p:nvGrpSpPr>
+      <p:grpSpPr>
+        <a:xfrm>
+          <a:off x="0" y="0"/>
+          <a:ext cx="0" cy="0"/>
+          <a:chOff x="0" y="0"/>
+          <a:chExt cx="0" cy="0"/>
+        </a:xfrm>
+      </p:grpSpPr>
       <p:pic>
         <p:nvPicPr>
           <p:cNvPr id="1026" name="Picture 2" descr="EscuelaIT Duoc UC - Escuela de Informática y Telecomunicaciones Duoc UC - Duoc  UC | LinkedIn">
             <a:extLst>
               <a:ext uri="{FF2B5EF4-FFF2-40B4-BE49-F238E27FC236}">
-                <a16:creationId xmlns:a16="http://schemas.microsoft.com/office/drawing/2014/main" id="{DBCE0F62-5978-5D25-A8E3-872B6D0A9912}"/>
+                <a16:creationId xmlns:a16="http://schemas.microsoft.com/office/drawing/2014/main" id="{77B4224A-3140-F796-8FC4-E5FC461E8C8C}"/>
               </a:ext>
             </a:extLst>
           </p:cNvPr>
@@ -9750,7 +10931,7 @@
           <p:cNvPr id="4" name="CuadroTexto 3">
             <a:extLst>
               <a:ext uri="{FF2B5EF4-FFF2-40B4-BE49-F238E27FC236}">
-                <a16:creationId xmlns:a16="http://schemas.microsoft.com/office/drawing/2014/main" id="{E3B5815F-4341-2A3D-A22D-8F6657D201F3}"/>
+                <a16:creationId xmlns:a16="http://schemas.microsoft.com/office/drawing/2014/main" id="{FC1A919B-71AE-2667-1895-710444A9FDD1}"/>
               </a:ext>
             </a:extLst>
           </p:cNvPr>
@@ -9759,8 +10940,8 @@
         </p:nvSpPr>
         <p:spPr>
           <a:xfrm>
-            <a:off x="1" y="1459095"/>
-            <a:ext cx="12191999" cy="769441"/>
+            <a:off x="1" y="2707792"/>
+            <a:ext cx="12191999" cy="1138773"/>
           </a:xfrm>
           <a:prstGeom prst="rect">
             <a:avLst/>
@@ -9775,16 +10956,26 @@
           <a:p>
             <a:pPr algn="ctr"/>
             <a:r>
-              <a:rPr lang="es-MX" sz="4400" dirty="0"/>
-              <a:t>Resultados obtenidos</a:t>
+              <a:rPr lang="es-MX" sz="4400"/>
+              <a:t>DEMOSTRACIÓN DEL RESULTADO DEL PROYECTO</a:t>
             </a:r>
+          </a:p>
+          <a:p>
+            <a:pPr algn="ctr"/>
+            <a:endParaRPr lang="es-CL" sz="2400">
+              <a:solidFill>
+                <a:schemeClr val="bg2">
+                  <a:lumMod val="50000"/>
+                </a:schemeClr>
+              </a:solidFill>
+            </a:endParaRPr>
           </a:p>
         </p:txBody>
       </p:sp>
     </p:spTree>
     <p:extLst>
       <p:ext uri="{BB962C8B-B14F-4D97-AF65-F5344CB8AC3E}">
-        <p14:creationId xmlns:p14="http://schemas.microsoft.com/office/powerpoint/2010/main" val="2904893737"/>
+        <p14:creationId xmlns:p14="http://schemas.microsoft.com/office/powerpoint/2010/main" val="1419688379"/>
       </p:ext>
     </p:extLst>
   </p:cSld>
@@ -9880,127 +11071,6 @@
         </p:nvSpPr>
         <p:spPr>
           <a:xfrm>
-            <a:off x="1" y="1360773"/>
-            <a:ext cx="12191999" cy="769441"/>
-          </a:xfrm>
-          <a:prstGeom prst="rect">
-            <a:avLst/>
-          </a:prstGeom>
-          <a:noFill/>
-        </p:spPr>
-        <p:txBody>
-          <a:bodyPr wrap="square" rtlCol="0">
-            <a:spAutoFit/>
-          </a:bodyPr>
-          <a:lstStyle/>
-          <a:p>
-            <a:pPr algn="ctr"/>
-            <a:r>
-              <a:rPr lang="es-MX" sz="4400" dirty="0"/>
-              <a:t>Obstáculos presentados durante el desarrollo</a:t>
-            </a:r>
-          </a:p>
-        </p:txBody>
-      </p:sp>
-    </p:spTree>
-    <p:extLst>
-      <p:ext uri="{BB962C8B-B14F-4D97-AF65-F5344CB8AC3E}">
-        <p14:creationId xmlns:p14="http://schemas.microsoft.com/office/powerpoint/2010/main" val="1266268508"/>
-      </p:ext>
-    </p:extLst>
-  </p:cSld>
-  <p:clrMapOvr>
-    <a:masterClrMapping/>
-  </p:clrMapOvr>
-  <mc:AlternateContent xmlns:mc="http://schemas.openxmlformats.org/markup-compatibility/2006" xmlns:p14="http://schemas.microsoft.com/office/powerpoint/2010/main">
-    <mc:Choice Requires="p14">
-      <p:transition p14:dur="0"/>
-    </mc:Choice>
-    <mc:Fallback xmlns="">
-      <p:transition/>
-    </mc:Fallback>
-  </mc:AlternateContent>
-</p:sld>
-</file>
-
-<file path=ppt/slides/slide16.xml><?xml version="1.0" encoding="utf-8"?>
-<p:sld xmlns:a="http://schemas.openxmlformats.org/drawingml/2006/main" xmlns:r="http://schemas.openxmlformats.org/officeDocument/2006/relationships" xmlns:p="http://schemas.openxmlformats.org/presentationml/2006/main">
-  <p:cSld>
-    <p:spTree>
-      <p:nvGrpSpPr>
-        <p:cNvPr id="1" name=""/>
-        <p:cNvGrpSpPr/>
-        <p:nvPr/>
-      </p:nvGrpSpPr>
-      <p:grpSpPr>
-        <a:xfrm>
-          <a:off x="0" y="0"/>
-          <a:ext cx="0" cy="0"/>
-          <a:chOff x="0" y="0"/>
-          <a:chExt cx="0" cy="0"/>
-        </a:xfrm>
-      </p:grpSpPr>
-      <p:pic>
-        <p:nvPicPr>
-          <p:cNvPr id="1026" name="Picture 2" descr="EscuelaIT Duoc UC - Escuela de Informática y Telecomunicaciones Duoc UC - Duoc  UC | LinkedIn">
-            <a:extLst>
-              <a:ext uri="{FF2B5EF4-FFF2-40B4-BE49-F238E27FC236}">
-                <a16:creationId xmlns:a16="http://schemas.microsoft.com/office/drawing/2014/main" id="{DBCE0F62-5978-5D25-A8E3-872B6D0A9912}"/>
-              </a:ext>
-            </a:extLst>
-          </p:cNvPr>
-          <p:cNvPicPr>
-            <a:picLocks noChangeAspect="1" noChangeArrowheads="1"/>
-          </p:cNvPicPr>
-          <p:nvPr/>
-        </p:nvPicPr>
-        <p:blipFill>
-          <a:blip r:embed="rId2">
-            <a:extLst>
-              <a:ext uri="{28A0092B-C50C-407E-A947-70E740481C1C}">
-                <a14:useLocalDpi xmlns:a14="http://schemas.microsoft.com/office/drawing/2010/main" val="0"/>
-              </a:ext>
-            </a:extLst>
-          </a:blip>
-          <a:srcRect/>
-          <a:stretch>
-            <a:fillRect/>
-          </a:stretch>
-        </p:blipFill>
-        <p:spPr bwMode="auto">
-          <a:xfrm>
-            <a:off x="8772152" y="207550"/>
-            <a:ext cx="3141406" cy="785352"/>
-          </a:xfrm>
-          <a:prstGeom prst="rect">
-            <a:avLst/>
-          </a:prstGeom>
-          <a:noFill/>
-          <a:extLst>
-            <a:ext uri="{909E8E84-426E-40DD-AFC4-6F175D3DCCD1}">
-              <a14:hiddenFill xmlns:a14="http://schemas.microsoft.com/office/drawing/2010/main">
-                <a:solidFill>
-                  <a:srgbClr val="FFFFFF"/>
-                </a:solidFill>
-              </a14:hiddenFill>
-            </a:ext>
-          </a:extLst>
-        </p:spPr>
-      </p:pic>
-      <p:sp>
-        <p:nvSpPr>
-          <p:cNvPr id="4" name="CuadroTexto 3">
-            <a:extLst>
-              <a:ext uri="{FF2B5EF4-FFF2-40B4-BE49-F238E27FC236}">
-                <a16:creationId xmlns:a16="http://schemas.microsoft.com/office/drawing/2014/main" id="{E3B5815F-4341-2A3D-A22D-8F6657D201F3}"/>
-              </a:ext>
-            </a:extLst>
-          </p:cNvPr>
-          <p:cNvSpPr txBox="1"/>
-          <p:nvPr/>
-        </p:nvSpPr>
-        <p:spPr>
-          <a:xfrm>
             <a:off x="0" y="3044279"/>
             <a:ext cx="12191999" cy="769441"/>
           </a:xfrm>
@@ -10017,7 +11087,7 @@
           <a:p>
             <a:pPr algn="ctr"/>
             <a:r>
-              <a:rPr lang="es-MX" sz="4400" dirty="0"/>
+              <a:rPr lang="es-MX" sz="4400"/>
               <a:t>PREGUNTAS DE LA COMISIÓN</a:t>
             </a:r>
           </a:p>
@@ -10121,7 +11191,7 @@
           <p:nvPr>
             <p:extLst>
               <p:ext uri="{D42A27DB-BD31-4B8C-83A1-F6EECF244321}">
-                <p14:modId xmlns:p14="http://schemas.microsoft.com/office/powerpoint/2010/main" val="69360649"/>
+                <p14:modId xmlns:p14="http://schemas.microsoft.com/office/powerpoint/2010/main" val="2364037377"/>
               </p:ext>
             </p:extLst>
           </p:nvPr>
@@ -10165,7 +11235,7 @@
           <a:lstStyle/>
           <a:p>
             <a:r>
-              <a:rPr lang="es-MX" dirty="0">
+              <a:rPr lang="es-MX">
                 <a:solidFill>
                   <a:schemeClr val="bg2">
                     <a:lumMod val="50000"/>
@@ -10207,10 +11277,10 @@
           <a:p>
             <a:pPr algn="ctr"/>
             <a:r>
-              <a:rPr lang="es-MX" sz="3600" dirty="0"/>
+              <a:rPr lang="es-MX" sz="3600"/>
               <a:t>INTEGRANTES DEL PROYECTO</a:t>
             </a:r>
-            <a:endParaRPr lang="es-CL" dirty="0"/>
+            <a:endParaRPr lang="es-CL"/>
           </a:p>
         </p:txBody>
       </p:sp>
@@ -10335,7 +11405,7 @@
           <p:nvPr/>
         </p:nvPicPr>
         <p:blipFill>
-          <a:blip r:embed="rId2">
+          <a:blip r:embed="rId3">
             <a:extLst>
               <a:ext uri="{28A0092B-C50C-407E-A947-70E740481C1C}">
                 <a14:useLocalDpi xmlns:a14="http://schemas.microsoft.com/office/drawing/2010/main" val="0"/>
@@ -10396,7 +11466,7 @@
           <a:lstStyle/>
           <a:p>
             <a:r>
-              <a:rPr lang="es-MX" dirty="0">
+              <a:rPr lang="es-MX">
                 <a:solidFill>
                   <a:schemeClr val="bg2">
                     <a:lumMod val="50000"/>
@@ -10438,10 +11508,10 @@
           <a:p>
             <a:pPr algn="ctr"/>
             <a:r>
-              <a:rPr lang="es-MX" sz="3600" dirty="0"/>
+              <a:rPr lang="es-MX" sz="3600"/>
               <a:t>DESCRIPCIÓN DEL PROYECTO</a:t>
             </a:r>
-            <a:endParaRPr lang="es-CL" dirty="0"/>
+            <a:endParaRPr lang="es-CL"/>
           </a:p>
         </p:txBody>
       </p:sp>
@@ -10556,13 +11626,13 @@
           <a:p>
             <a:pPr lvl="0" algn="ctr"/>
             <a:r>
-              <a:rPr lang="es-MX" sz="2800" u="sng" dirty="0"/>
+              <a:rPr lang="es-MX" sz="2800" u="sng"/>
               <a:t>Problema o dolor</a:t>
             </a:r>
           </a:p>
           <a:p>
             <a:pPr lvl="0" algn="ctr"/>
-            <a:endParaRPr lang="es-MX" u="sng" dirty="0"/>
+            <a:endParaRPr lang="es-MX" u="sng"/>
           </a:p>
           <a:p>
             <a:pPr marL="285750" indent="-285750" algn="just">
@@ -10570,7 +11640,7 @@
               <a:buChar char="•"/>
             </a:pPr>
             <a:r>
-              <a:rPr lang="es-MX" sz="1800" dirty="0"/>
+              <a:rPr lang="es-MX" sz="1800"/>
               <a:t>Dificultad para tomar decisiones de compra</a:t>
             </a:r>
           </a:p>
@@ -10580,7 +11650,7 @@
               <a:buChar char="•"/>
             </a:pPr>
             <a:r>
-              <a:rPr lang="es-MX" dirty="0"/>
+              <a:rPr lang="es-MX"/>
               <a:t>Repetición de compras por inercia</a:t>
             </a:r>
           </a:p>
@@ -10590,7 +11660,7 @@
               <a:buChar char="•"/>
             </a:pPr>
             <a:r>
-              <a:rPr lang="es-MX" dirty="0"/>
+              <a:rPr lang="es-MX"/>
               <a:t>Perdida de poder adquisitivo</a:t>
             </a:r>
           </a:p>
@@ -10599,11 +11669,11 @@
               <a:buFont typeface="Arial" panose="020B0604020202020204" pitchFamily="34" charset="0"/>
               <a:buChar char="•"/>
             </a:pPr>
-            <a:endParaRPr lang="es-CL" sz="1800" dirty="0"/>
+            <a:endParaRPr lang="es-CL" sz="1800"/>
           </a:p>
           <a:p>
             <a:pPr lvl="0" algn="ctr"/>
-            <a:endParaRPr lang="es-CL" sz="1800" u="sng" dirty="0"/>
+            <a:endParaRPr lang="es-CL" sz="1800" u="sng"/>
           </a:p>
         </p:txBody>
       </p:sp>
@@ -10650,13 +11720,13 @@
           <a:p>
             <a:pPr lvl="0" algn="ctr"/>
             <a:r>
-              <a:rPr lang="es-MX" sz="2800" u="sng" dirty="0"/>
+              <a:rPr lang="es-MX" sz="2800" u="sng"/>
               <a:t>Propuesta de solución</a:t>
             </a:r>
           </a:p>
           <a:p>
             <a:pPr lvl="0" algn="ctr"/>
-            <a:endParaRPr lang="es-MX" u="sng" dirty="0"/>
+            <a:endParaRPr lang="es-MX" u="sng"/>
           </a:p>
           <a:p>
             <a:pPr marL="285750" lvl="0" indent="-285750" algn="just">
@@ -10664,7 +11734,7 @@
               <a:buChar char="•"/>
             </a:pPr>
             <a:r>
-              <a:rPr lang="es-MX" dirty="0"/>
+              <a:rPr lang="es-MX"/>
               <a:t>Plataforma web</a:t>
             </a:r>
           </a:p>
@@ -10674,7 +11744,7 @@
               <a:buChar char="•"/>
             </a:pPr>
             <a:r>
-              <a:rPr lang="es-MX" sz="1800" dirty="0"/>
+              <a:rPr lang="es-MX" sz="1800"/>
               <a:t>Comparación rápida de productos</a:t>
             </a:r>
           </a:p>
@@ -10684,7 +11754,7 @@
               <a:buChar char="•"/>
             </a:pPr>
             <a:r>
-              <a:rPr lang="es-MX" dirty="0"/>
+              <a:rPr lang="es-MX"/>
               <a:t>Historial de precios</a:t>
             </a:r>
           </a:p>
@@ -10694,10 +11764,10 @@
               <a:buChar char="•"/>
             </a:pPr>
             <a:r>
-              <a:rPr lang="es-MX" sz="1800" dirty="0"/>
+              <a:rPr lang="es-MX" sz="1800"/>
               <a:t>Listas de compras </a:t>
             </a:r>
-            <a:endParaRPr lang="es-CL" sz="1800" dirty="0"/>
+            <a:endParaRPr lang="es-CL" sz="1800"/>
           </a:p>
         </p:txBody>
       </p:sp>
@@ -10759,188 +11829,12 @@
   </p:clrMapOvr>
   <mc:AlternateContent xmlns:mc="http://schemas.openxmlformats.org/markup-compatibility/2006" xmlns:p14="http://schemas.microsoft.com/office/powerpoint/2010/main">
     <mc:Choice Requires="p14">
-      <p:transition p14:dur="0"/>
+      <p:transition p14:dur="10"/>
     </mc:Choice>
     <mc:Fallback xmlns="">
       <p:transition/>
     </mc:Fallback>
   </mc:AlternateContent>
-  <p:timing>
-    <p:tnLst>
-      <p:par>
-        <p:cTn id="1" dur="indefinite" restart="never" nodeType="tmRoot">
-          <p:childTnLst>
-            <p:seq concurrent="1" nextAc="seek">
-              <p:cTn id="2" dur="indefinite" nodeType="mainSeq">
-                <p:childTnLst>
-                  <p:par>
-                    <p:cTn id="3" fill="hold">
-                      <p:stCondLst>
-                        <p:cond delay="indefinite"/>
-                      </p:stCondLst>
-                      <p:childTnLst>
-                        <p:par>
-                          <p:cTn id="4" fill="hold">
-                            <p:stCondLst>
-                              <p:cond delay="0"/>
-                            </p:stCondLst>
-                            <p:childTnLst>
-                              <p:par>
-                                <p:cTn id="5" presetID="10" presetClass="entr" presetSubtype="0" fill="hold" grpId="0" nodeType="clickEffect">
-                                  <p:stCondLst>
-                                    <p:cond delay="0"/>
-                                  </p:stCondLst>
-                                  <p:childTnLst>
-                                    <p:set>
-                                      <p:cBhvr>
-                                        <p:cTn id="6" dur="1" fill="hold">
-                                          <p:stCondLst>
-                                            <p:cond delay="0"/>
-                                          </p:stCondLst>
-                                        </p:cTn>
-                                        <p:tgtEl>
-                                          <p:spTgt spid="3"/>
-                                        </p:tgtEl>
-                                        <p:attrNameLst>
-                                          <p:attrName>style.visibility</p:attrName>
-                                        </p:attrNameLst>
-                                      </p:cBhvr>
-                                      <p:to>
-                                        <p:strVal val="visible"/>
-                                      </p:to>
-                                    </p:set>
-                                    <p:animEffect transition="in" filter="fade">
-                                      <p:cBhvr>
-                                        <p:cTn id="7" dur="500"/>
-                                        <p:tgtEl>
-                                          <p:spTgt spid="3"/>
-                                        </p:tgtEl>
-                                      </p:cBhvr>
-                                    </p:animEffect>
-                                  </p:childTnLst>
-                                </p:cTn>
-                              </p:par>
-                            </p:childTnLst>
-                          </p:cTn>
-                        </p:par>
-                      </p:childTnLst>
-                    </p:cTn>
-                  </p:par>
-                  <p:par>
-                    <p:cTn id="8" fill="hold">
-                      <p:stCondLst>
-                        <p:cond delay="indefinite"/>
-                      </p:stCondLst>
-                      <p:childTnLst>
-                        <p:par>
-                          <p:cTn id="9" fill="hold">
-                            <p:stCondLst>
-                              <p:cond delay="0"/>
-                            </p:stCondLst>
-                            <p:childTnLst>
-                              <p:par>
-                                <p:cTn id="10" presetID="10" presetClass="entr" presetSubtype="0" fill="hold" grpId="0" nodeType="clickEffect">
-                                  <p:stCondLst>
-                                    <p:cond delay="0"/>
-                                  </p:stCondLst>
-                                  <p:childTnLst>
-                                    <p:set>
-                                      <p:cBhvr>
-                                        <p:cTn id="11" dur="1" fill="hold">
-                                          <p:stCondLst>
-                                            <p:cond delay="0"/>
-                                          </p:stCondLst>
-                                        </p:cTn>
-                                        <p:tgtEl>
-                                          <p:spTgt spid="8"/>
-                                        </p:tgtEl>
-                                        <p:attrNameLst>
-                                          <p:attrName>style.visibility</p:attrName>
-                                        </p:attrNameLst>
-                                      </p:cBhvr>
-                                      <p:to>
-                                        <p:strVal val="visible"/>
-                                      </p:to>
-                                    </p:set>
-                                    <p:animEffect transition="in" filter="fade">
-                                      <p:cBhvr>
-                                        <p:cTn id="12" dur="500"/>
-                                        <p:tgtEl>
-                                          <p:spTgt spid="8"/>
-                                        </p:tgtEl>
-                                      </p:cBhvr>
-                                    </p:animEffect>
-                                  </p:childTnLst>
-                                </p:cTn>
-                              </p:par>
-                              <p:par>
-                                <p:cTn id="13" presetID="10" presetClass="entr" presetSubtype="0" fill="hold" grpId="0" nodeType="withEffect">
-                                  <p:stCondLst>
-                                    <p:cond delay="0"/>
-                                  </p:stCondLst>
-                                  <p:childTnLst>
-                                    <p:set>
-                                      <p:cBhvr>
-                                        <p:cTn id="14" dur="1" fill="hold">
-                                          <p:stCondLst>
-                                            <p:cond delay="0"/>
-                                          </p:stCondLst>
-                                        </p:cTn>
-                                        <p:tgtEl>
-                                          <p:spTgt spid="4"/>
-                                        </p:tgtEl>
-                                        <p:attrNameLst>
-                                          <p:attrName>style.visibility</p:attrName>
-                                        </p:attrNameLst>
-                                      </p:cBhvr>
-                                      <p:to>
-                                        <p:strVal val="visible"/>
-                                      </p:to>
-                                    </p:set>
-                                    <p:animEffect transition="in" filter="fade">
-                                      <p:cBhvr>
-                                        <p:cTn id="15" dur="500"/>
-                                        <p:tgtEl>
-                                          <p:spTgt spid="4"/>
-                                        </p:tgtEl>
-                                      </p:cBhvr>
-                                    </p:animEffect>
-                                  </p:childTnLst>
-                                </p:cTn>
-                              </p:par>
-                            </p:childTnLst>
-                          </p:cTn>
-                        </p:par>
-                      </p:childTnLst>
-                    </p:cTn>
-                  </p:par>
-                </p:childTnLst>
-              </p:cTn>
-              <p:prevCondLst>
-                <p:cond evt="onPrev" delay="0">
-                  <p:tgtEl>
-                    <p:sldTgt/>
-                  </p:tgtEl>
-                </p:cond>
-              </p:prevCondLst>
-              <p:nextCondLst>
-                <p:cond evt="onNext" delay="0">
-                  <p:tgtEl>
-                    <p:sldTgt/>
-                  </p:tgtEl>
-                </p:cond>
-              </p:nextCondLst>
-            </p:seq>
-          </p:childTnLst>
-        </p:cTn>
-      </p:par>
-    </p:tnLst>
-    <p:bldLst>
-      <p:bldP spid="3" grpId="0" animBg="1"/>
-      <p:bldP spid="4" grpId="0" animBg="1"/>
-      <p:bldP spid="8" grpId="0" animBg="1"/>
-    </p:bldLst>
-  </p:timing>
 </p:sld>
 </file>
 
@@ -10976,7 +11870,7 @@
           <p:nvPr/>
         </p:nvPicPr>
         <p:blipFill>
-          <a:blip r:embed="rId2">
+          <a:blip r:embed="rId3">
             <a:extLst>
               <a:ext uri="{28A0092B-C50C-407E-A947-70E740481C1C}">
                 <a14:useLocalDpi xmlns:a14="http://schemas.microsoft.com/office/drawing/2010/main" val="0"/>
@@ -11037,7 +11931,7 @@
           <a:lstStyle/>
           <a:p>
             <a:r>
-              <a:rPr lang="es-MX" dirty="0">
+              <a:rPr lang="es-MX">
                 <a:solidFill>
                   <a:schemeClr val="bg2">
                     <a:lumMod val="50000"/>
@@ -11079,10 +11973,10 @@
           <a:p>
             <a:pPr algn="ctr"/>
             <a:r>
-              <a:rPr lang="es-MX" sz="3600" dirty="0"/>
+              <a:rPr lang="es-MX" sz="3600"/>
               <a:t>Objetivo General</a:t>
             </a:r>
-            <a:endParaRPr lang="es-CL" dirty="0"/>
+            <a:endParaRPr lang="es-CL"/>
           </a:p>
         </p:txBody>
       </p:sp>
@@ -11184,10 +12078,10 @@
           <a:p>
             <a:pPr algn="ctr"/>
             <a:r>
-              <a:rPr lang="es-MX" sz="3600" dirty="0"/>
+              <a:rPr lang="es-MX" sz="3600"/>
               <a:t>Objetivos Específicos</a:t>
             </a:r>
-            <a:endParaRPr lang="es-CL" dirty="0"/>
+            <a:endParaRPr lang="es-CL"/>
           </a:p>
         </p:txBody>
       </p:sp>
@@ -11232,10 +12126,10 @@
           <a:p>
             <a:pPr algn="ctr"/>
             <a:r>
-              <a:rPr lang="es-ES" dirty="0"/>
+              <a:rPr lang="es-ES"/>
               <a:t>Desarrollar una plataforma web que permita comparar productos según su precio por unidad, registrar historial de precios y gestionar listas de compra, fomentando decisiones de consumo informadas.</a:t>
             </a:r>
-            <a:endParaRPr lang="es-CL" dirty="0"/>
+            <a:endParaRPr lang="es-CL"/>
           </a:p>
         </p:txBody>
       </p:sp>
@@ -11283,7 +12177,7 @@
               <a:buChar char="•"/>
             </a:pPr>
             <a:r>
-              <a:rPr lang="es-CL" dirty="0"/>
+              <a:rPr lang="es-CL"/>
               <a:t>Modulo de calculo de precios</a:t>
             </a:r>
           </a:p>
@@ -11293,7 +12187,7 @@
               <a:buChar char="•"/>
             </a:pPr>
             <a:r>
-              <a:rPr lang="es-CL" dirty="0"/>
+              <a:rPr lang="es-CL"/>
               <a:t>Registro de precios</a:t>
             </a:r>
           </a:p>
@@ -11303,7 +12197,7 @@
               <a:buChar char="•"/>
             </a:pPr>
             <a:r>
-              <a:rPr lang="es-CL" dirty="0"/>
+              <a:rPr lang="es-CL"/>
               <a:t>Modulo de listas de compras</a:t>
             </a:r>
           </a:p>
@@ -11313,7 +12207,7 @@
               <a:buChar char="•"/>
             </a:pPr>
             <a:r>
-              <a:rPr lang="es-CL" dirty="0"/>
+              <a:rPr lang="es-CL"/>
               <a:t>Interfaz sencilla y accesible</a:t>
             </a:r>
           </a:p>
@@ -11337,128 +12231,6 @@
       <p:transition/>
     </mc:Fallback>
   </mc:AlternateContent>
-  <p:timing>
-    <p:tnLst>
-      <p:par>
-        <p:cTn id="1" dur="indefinite" restart="never" nodeType="tmRoot">
-          <p:childTnLst>
-            <p:seq concurrent="1" nextAc="seek">
-              <p:cTn id="2" dur="indefinite" nodeType="mainSeq">
-                <p:childTnLst>
-                  <p:par>
-                    <p:cTn id="3" fill="hold">
-                      <p:stCondLst>
-                        <p:cond delay="indefinite"/>
-                      </p:stCondLst>
-                      <p:childTnLst>
-                        <p:par>
-                          <p:cTn id="4" fill="hold">
-                            <p:stCondLst>
-                              <p:cond delay="0"/>
-                            </p:stCondLst>
-                            <p:childTnLst>
-                              <p:par>
-                                <p:cTn id="5" presetID="10" presetClass="entr" presetSubtype="0" fill="hold" grpId="0" nodeType="clickEffect">
-                                  <p:stCondLst>
-                                    <p:cond delay="0"/>
-                                  </p:stCondLst>
-                                  <p:childTnLst>
-                                    <p:set>
-                                      <p:cBhvr>
-                                        <p:cTn id="6" dur="1" fill="hold">
-                                          <p:stCondLst>
-                                            <p:cond delay="0"/>
-                                          </p:stCondLst>
-                                        </p:cTn>
-                                        <p:tgtEl>
-                                          <p:spTgt spid="2"/>
-                                        </p:tgtEl>
-                                        <p:attrNameLst>
-                                          <p:attrName>style.visibility</p:attrName>
-                                        </p:attrNameLst>
-                                      </p:cBhvr>
-                                      <p:to>
-                                        <p:strVal val="visible"/>
-                                      </p:to>
-                                    </p:set>
-                                    <p:animEffect transition="in" filter="fade">
-                                      <p:cBhvr>
-                                        <p:cTn id="7" dur="500"/>
-                                        <p:tgtEl>
-                                          <p:spTgt spid="2"/>
-                                        </p:tgtEl>
-                                      </p:cBhvr>
-                                    </p:animEffect>
-                                  </p:childTnLst>
-                                </p:cTn>
-                              </p:par>
-                              <p:par>
-                                <p:cTn id="8" presetID="10" presetClass="entr" presetSubtype="0" fill="hold" grpId="0" nodeType="withEffect">
-                                  <p:stCondLst>
-                                    <p:cond delay="0"/>
-                                  </p:stCondLst>
-                                  <p:childTnLst>
-                                    <p:set>
-                                      <p:cBhvr>
-                                        <p:cTn id="9" dur="1" fill="hold">
-                                          <p:stCondLst>
-                                            <p:cond delay="0"/>
-                                          </p:stCondLst>
-                                        </p:cTn>
-                                        <p:tgtEl>
-                                          <p:spTgt spid="4"/>
-                                        </p:tgtEl>
-                                        <p:attrNameLst>
-                                          <p:attrName>style.visibility</p:attrName>
-                                        </p:attrNameLst>
-                                      </p:cBhvr>
-                                      <p:to>
-                                        <p:strVal val="visible"/>
-                                      </p:to>
-                                    </p:set>
-                                    <p:animEffect transition="in" filter="fade">
-                                      <p:cBhvr>
-                                        <p:cTn id="10" dur="500"/>
-                                        <p:tgtEl>
-                                          <p:spTgt spid="4"/>
-                                        </p:tgtEl>
-                                      </p:cBhvr>
-                                    </p:animEffect>
-                                  </p:childTnLst>
-                                </p:cTn>
-                              </p:par>
-                            </p:childTnLst>
-                          </p:cTn>
-                        </p:par>
-                      </p:childTnLst>
-                    </p:cTn>
-                  </p:par>
-                </p:childTnLst>
-              </p:cTn>
-              <p:prevCondLst>
-                <p:cond evt="onPrev" delay="0">
-                  <p:tgtEl>
-                    <p:sldTgt/>
-                  </p:tgtEl>
-                </p:cond>
-              </p:prevCondLst>
-              <p:nextCondLst>
-                <p:cond evt="onNext" delay="0">
-                  <p:tgtEl>
-                    <p:sldTgt/>
-                  </p:tgtEl>
-                </p:cond>
-              </p:nextCondLst>
-            </p:seq>
-          </p:childTnLst>
-        </p:cTn>
-      </p:par>
-    </p:tnLst>
-    <p:bldLst>
-      <p:bldP spid="2" grpId="0"/>
-      <p:bldP spid="4" grpId="0" animBg="1"/>
-    </p:bldLst>
-  </p:timing>
 </p:sld>
 </file>
 
@@ -11494,7 +12266,7 @@
           <p:nvPr/>
         </p:nvPicPr>
         <p:blipFill>
-          <a:blip r:embed="rId2">
+          <a:blip r:embed="rId3">
             <a:extLst>
               <a:ext uri="{28A0092B-C50C-407E-A947-70E740481C1C}">
                 <a14:useLocalDpi xmlns:a14="http://schemas.microsoft.com/office/drawing/2010/main" val="0"/>
@@ -11555,7 +12327,7 @@
           <a:lstStyle/>
           <a:p>
             <a:r>
-              <a:rPr lang="es-MX" dirty="0">
+              <a:rPr lang="es-MX">
                 <a:solidFill>
                   <a:schemeClr val="bg2">
                     <a:lumMod val="50000"/>
@@ -11597,7 +12369,7 @@
           <a:p>
             <a:pPr algn="ctr"/>
             <a:r>
-              <a:rPr lang="es-MX" sz="3600" dirty="0"/>
+              <a:rPr lang="es-MX" sz="3600"/>
               <a:t>Alcances y limitaciones del proyecto</a:t>
             </a:r>
           </a:p>
@@ -11686,7 +12458,7 @@
           <p:nvPr/>
         </p:nvPicPr>
         <p:blipFill>
-          <a:blip r:embed="rId3">
+          <a:blip r:embed="rId4">
             <a:extLst>
               <a:ext uri="{28A0092B-C50C-407E-A947-70E740481C1C}">
                 <a14:useLocalDpi xmlns:a14="http://schemas.microsoft.com/office/drawing/2010/main" val="0"/>
@@ -11733,7 +12505,7 @@
           <p:nvPr/>
         </p:nvPicPr>
         <p:blipFill>
-          <a:blip r:embed="rId4">
+          <a:blip r:embed="rId5">
             <a:extLst>
               <a:ext uri="{28A0092B-C50C-407E-A947-70E740481C1C}">
                 <a14:useLocalDpi xmlns:a14="http://schemas.microsoft.com/office/drawing/2010/main" val="0"/>
@@ -11780,7 +12552,7 @@
           <p:nvPr/>
         </p:nvPicPr>
         <p:blipFill>
-          <a:blip r:embed="rId5">
+          <a:blip r:embed="rId6">
             <a:extLst>
               <a:ext uri="{28A0092B-C50C-407E-A947-70E740481C1C}">
                 <a14:useLocalDpi xmlns:a14="http://schemas.microsoft.com/office/drawing/2010/main" val="0"/>
@@ -11865,7 +12637,7 @@
           <p:nvPr/>
         </p:nvPicPr>
         <p:blipFill>
-          <a:blip r:embed="rId2">
+          <a:blip r:embed="rId3">
             <a:extLst>
               <a:ext uri="{28A0092B-C50C-407E-A947-70E740481C1C}">
                 <a14:useLocalDpi xmlns:a14="http://schemas.microsoft.com/office/drawing/2010/main" val="0"/>
@@ -11926,7 +12698,7 @@
           <a:lstStyle/>
           <a:p>
             <a:r>
-              <a:rPr lang="es-MX" dirty="0">
+              <a:rPr lang="es-MX">
                 <a:solidFill>
                   <a:schemeClr val="bg2">
                     <a:lumMod val="50000"/>
@@ -11968,10 +12740,10 @@
           <a:p>
             <a:pPr algn="ctr"/>
             <a:r>
-              <a:rPr lang="es-MX" sz="3600" dirty="0"/>
+              <a:rPr lang="es-MX" sz="3600"/>
               <a:t>Metodología de trabajo para el desarrollo del proyecto</a:t>
             </a:r>
-            <a:endParaRPr lang="es-CL" dirty="0"/>
+            <a:endParaRPr lang="es-CL"/>
           </a:p>
         </p:txBody>
       </p:sp>
@@ -12058,7 +12830,7 @@
           <p:nvPr/>
         </p:nvPicPr>
         <p:blipFill>
-          <a:blip r:embed="rId3">
+          <a:blip r:embed="rId4">
             <a:extLst>
               <a:ext uri="{28A0092B-C50C-407E-A947-70E740481C1C}">
                 <a14:useLocalDpi xmlns:a14="http://schemas.microsoft.com/office/drawing/2010/main" val="0"/>
@@ -12143,7 +12915,7 @@
           <p:nvPr/>
         </p:nvPicPr>
         <p:blipFill>
-          <a:blip r:embed="rId2">
+          <a:blip r:embed="rId3">
             <a:extLst>
               <a:ext uri="{28A0092B-C50C-407E-A947-70E740481C1C}">
                 <a14:useLocalDpi xmlns:a14="http://schemas.microsoft.com/office/drawing/2010/main" val="0"/>
@@ -12204,7 +12976,7 @@
           <a:lstStyle/>
           <a:p>
             <a:r>
-              <a:rPr lang="es-MX" dirty="0">
+              <a:rPr lang="es-MX">
                 <a:solidFill>
                   <a:schemeClr val="bg2">
                     <a:lumMod val="50000"/>
@@ -12246,7 +13018,7 @@
           <a:p>
             <a:pPr algn="ctr"/>
             <a:r>
-              <a:rPr lang="es-MX" sz="3600" dirty="0"/>
+              <a:rPr lang="es-MX" sz="3600"/>
               <a:t>Cronograma para el desarrollo del proyecto</a:t>
             </a:r>
           </a:p>
@@ -14303,7 +15075,7 @@
                         </a:spcAft>
                       </a:pPr>
                       <a:r>
-                        <a:rPr lang="es-CL" sz="800" i="1" dirty="0">
+                        <a:rPr lang="es-CL" sz="800" i="1">
                           <a:solidFill>
                             <a:srgbClr val="548DD4"/>
                           </a:solidFill>
@@ -14314,7 +15086,7 @@
                         </a:rPr>
                         <a:t>Describe actividades del punto anterior</a:t>
                       </a:r>
-                      <a:endParaRPr lang="es-CL" sz="1100" dirty="0">
+                      <a:endParaRPr lang="es-CL" sz="1100">
                         <a:effectLst/>
                         <a:latin typeface="Calibri" panose="020F0502020204030204" pitchFamily="34" charset="0"/>
                         <a:ea typeface="Calibri" panose="020F0502020204030204" pitchFamily="34" charset="0"/>
@@ -14513,7 +15285,7 @@
                         </a:spcAft>
                       </a:pPr>
                       <a:r>
-                        <a:rPr lang="es-CL" sz="800" b="1" dirty="0">
+                        <a:rPr lang="es-CL" sz="800" b="1">
                           <a:effectLst/>
                           <a:latin typeface="Calibri" panose="020F0502020204030204" pitchFamily="34" charset="0"/>
                           <a:ea typeface="Calibri" panose="020F0502020204030204" pitchFamily="34" charset="0"/>
@@ -14521,7 +15293,7 @@
                         </a:rPr>
                         <a:t> </a:t>
                       </a:r>
-                      <a:endParaRPr lang="es-CL" sz="1100" dirty="0">
+                      <a:endParaRPr lang="es-CL" sz="1100">
                         <a:effectLst/>
                         <a:latin typeface="Calibri" panose="020F0502020204030204" pitchFamily="34" charset="0"/>
                         <a:ea typeface="Calibri" panose="020F0502020204030204" pitchFamily="34" charset="0"/>
@@ -14996,7 +15768,7 @@
                         </a:spcAft>
                       </a:pPr>
                       <a:r>
-                        <a:rPr lang="es-CL" sz="800" b="1" dirty="0">
+                        <a:rPr lang="es-CL" sz="800" b="1">
                           <a:effectLst/>
                           <a:latin typeface="Calibri" panose="020F0502020204030204" pitchFamily="34" charset="0"/>
                           <a:ea typeface="Calibri" panose="020F0502020204030204" pitchFamily="34" charset="0"/>
@@ -15004,7 +15776,7 @@
                         </a:rPr>
                         <a:t> </a:t>
                       </a:r>
-                      <a:endParaRPr lang="es-CL" sz="1100" dirty="0">
+                      <a:endParaRPr lang="es-CL" sz="1100">
                         <a:effectLst/>
                         <a:latin typeface="Calibri" panose="020F0502020204030204" pitchFamily="34" charset="0"/>
                         <a:ea typeface="Calibri" panose="020F0502020204030204" pitchFamily="34" charset="0"/>
@@ -18373,7 +19145,7 @@
                         </a:spcAft>
                       </a:pPr>
                       <a:r>
-                        <a:rPr lang="es-CL" sz="1100" dirty="0">
+                        <a:rPr lang="es-CL" sz="1100">
                           <a:effectLst/>
                           <a:latin typeface="Calibri" panose="020F0502020204030204" pitchFamily="34" charset="0"/>
                           <a:ea typeface="Calibri" panose="020F0502020204030204" pitchFamily="34" charset="0"/>
@@ -18429,7 +19201,7 @@
           <p:nvPr/>
         </p:nvPicPr>
         <p:blipFill>
-          <a:blip r:embed="rId3">
+          <a:blip r:embed="rId4">
             <a:extLst>
               <a:ext uri="{28A0092B-C50C-407E-A947-70E740481C1C}">
                 <a14:useLocalDpi xmlns:a14="http://schemas.microsoft.com/office/drawing/2010/main" val="0"/>
@@ -18462,7 +19234,7 @@
   </p:clrMapOvr>
   <mc:AlternateContent xmlns:mc="http://schemas.openxmlformats.org/markup-compatibility/2006" xmlns:p14="http://schemas.microsoft.com/office/powerpoint/2010/main">
     <mc:Choice Requires="p14">
-      <p:transition p14:dur="0"/>
+      <p:transition p14:dur="10"/>
     </mc:Choice>
     <mc:Fallback xmlns="">
       <p:transition/>
@@ -18503,7 +19275,7 @@
           <p:nvPr/>
         </p:nvPicPr>
         <p:blipFill>
-          <a:blip r:embed="rId2">
+          <a:blip r:embed="rId3">
             <a:extLst>
               <a:ext uri="{28A0092B-C50C-407E-A947-70E740481C1C}">
                 <a14:useLocalDpi xmlns:a14="http://schemas.microsoft.com/office/drawing/2010/main" val="0"/>
@@ -18564,7 +19336,7 @@
           <a:lstStyle/>
           <a:p>
             <a:r>
-              <a:rPr lang="es-MX" dirty="0">
+              <a:rPr lang="es-MX">
                 <a:solidFill>
                   <a:schemeClr val="bg2">
                     <a:lumMod val="50000"/>
@@ -18606,7 +19378,7 @@
           <a:p>
             <a:pPr algn="ctr"/>
             <a:r>
-              <a:rPr lang="es-MX" sz="3600" dirty="0"/>
+              <a:rPr lang="es-MX" sz="3600"/>
               <a:t>Arquitectura del software</a:t>
             </a:r>
           </a:p>
@@ -18695,7 +19467,7 @@
           <p:nvPr/>
         </p:nvPicPr>
         <p:blipFill>
-          <a:blip r:embed="rId3">
+          <a:blip r:embed="rId4">
             <a:extLst>
               <a:ext uri="{28A0092B-C50C-407E-A947-70E740481C1C}">
                 <a14:useLocalDpi xmlns:a14="http://schemas.microsoft.com/office/drawing/2010/main" val="0"/>
@@ -18742,7 +19514,7 @@
           <p:nvPr/>
         </p:nvPicPr>
         <p:blipFill>
-          <a:blip r:embed="rId4">
+          <a:blip r:embed="rId5">
             <a:extLst>
               <a:ext uri="{28A0092B-C50C-407E-A947-70E740481C1C}">
                 <a14:useLocalDpi xmlns:a14="http://schemas.microsoft.com/office/drawing/2010/main" val="0"/>
@@ -18827,7 +19599,7 @@
           <p:nvPr/>
         </p:nvPicPr>
         <p:blipFill>
-          <a:blip r:embed="rId2">
+          <a:blip r:embed="rId3">
             <a:extLst>
               <a:ext uri="{28A0092B-C50C-407E-A947-70E740481C1C}">
                 <a14:useLocalDpi xmlns:a14="http://schemas.microsoft.com/office/drawing/2010/main" val="0"/>
@@ -18863,7 +19635,7 @@
           <p:nvPr/>
         </p:nvPicPr>
         <p:blipFill>
-          <a:blip r:embed="rId3">
+          <a:blip r:embed="rId4">
             <a:extLst>
               <a:ext uri="{28A0092B-C50C-407E-A947-70E740481C1C}">
                 <a14:useLocalDpi xmlns:a14="http://schemas.microsoft.com/office/drawing/2010/main" val="0"/>
@@ -18924,7 +19696,7 @@
           <a:lstStyle/>
           <a:p>
             <a:r>
-              <a:rPr lang="es-MX" dirty="0">
+              <a:rPr lang="es-MX">
                 <a:solidFill>
                   <a:schemeClr val="bg2">
                     <a:lumMod val="50000"/>
@@ -18950,7 +19722,7 @@
         </p:nvSpPr>
         <p:spPr>
           <a:xfrm>
-            <a:off x="0" y="1432655"/>
+            <a:off x="1" y="1154280"/>
             <a:ext cx="12191999" cy="646331"/>
           </a:xfrm>
           <a:prstGeom prst="rect">
